--- a/doc_campusconnect/CampusConnect_Presentation_Soutenance.pptx
+++ b/doc_campusconnect/CampusConnect_Presentation_Soutenance.pptx
@@ -6,7 +6,7 @@
     <p:sldMasterId id="2147483661" r:id="rId2"/>
   </p:sldMasterIdLst>
   <p:notesMasterIdLst>
-    <p:notesMasterId r:id="rId15"/>
+    <p:notesMasterId r:id="rId20"/>
   </p:notesMasterIdLst>
   <p:sldIdLst>
     <p:sldId id="256" r:id="rId3"/>
@@ -16,11 +16,16 @@
     <p:sldId id="260" r:id="rId7"/>
     <p:sldId id="261" r:id="rId8"/>
     <p:sldId id="262" r:id="rId9"/>
-    <p:sldId id="267" r:id="rId10"/>
-    <p:sldId id="263" r:id="rId11"/>
-    <p:sldId id="268" r:id="rId12"/>
-    <p:sldId id="265" r:id="rId13"/>
-    <p:sldId id="266" r:id="rId14"/>
+    <p:sldId id="269" r:id="rId10"/>
+    <p:sldId id="270" r:id="rId11"/>
+    <p:sldId id="271" r:id="rId12"/>
+    <p:sldId id="272" r:id="rId13"/>
+    <p:sldId id="273" r:id="rId14"/>
+    <p:sldId id="274" r:id="rId15"/>
+    <p:sldId id="263" r:id="rId16"/>
+    <p:sldId id="268" r:id="rId17"/>
+    <p:sldId id="265" r:id="rId18"/>
+    <p:sldId id="266" r:id="rId19"/>
   </p:sldIdLst>
   <p:sldSz cx="12192000" cy="6858000"/>
   <p:notesSz cx="6858000" cy="9144000"/>
@@ -220,7 +225,7 @@
           <a:p>
             <a:fld id="{E608F6DD-7A1C-4808-BC5B-7687CFB29988}" type="datetimeFigureOut">
               <a:rPr lang="fr-MR" smtClean="0"/>
-              <a:t>06/14/2026</a:t>
+              <a:t>06/15/2026</a:t>
             </a:fld>
             <a:endParaRPr lang="fr-MR"/>
           </a:p>
@@ -1475,7 +1480,7 @@
           <a:p>
             <a:fld id="{9B53EBB8-5D93-480B-8E51-8A5CAA849165}" type="datetimeFigureOut">
               <a:rPr lang="fr-MR" smtClean="0"/>
-              <a:t>06/14/2026</a:t>
+              <a:t>06/15/2026</a:t>
             </a:fld>
             <a:endParaRPr lang="fr-MR"/>
           </a:p>
@@ -1675,7 +1680,7 @@
           <a:p>
             <a:fld id="{9B53EBB8-5D93-480B-8E51-8A5CAA849165}" type="datetimeFigureOut">
               <a:rPr lang="fr-MR" smtClean="0"/>
-              <a:t>06/14/2026</a:t>
+              <a:t>06/15/2026</a:t>
             </a:fld>
             <a:endParaRPr lang="fr-MR"/>
           </a:p>
@@ -1951,7 +1956,7 @@
           <a:p>
             <a:fld id="{9B53EBB8-5D93-480B-8E51-8A5CAA849165}" type="datetimeFigureOut">
               <a:rPr lang="fr-MR" smtClean="0"/>
-              <a:t>06/14/2026</a:t>
+              <a:t>06/15/2026</a:t>
             </a:fld>
             <a:endParaRPr lang="fr-MR"/>
           </a:p>
@@ -2219,7 +2224,7 @@
           <a:p>
             <a:fld id="{9B53EBB8-5D93-480B-8E51-8A5CAA849165}" type="datetimeFigureOut">
               <a:rPr lang="fr-MR" smtClean="0"/>
-              <a:t>06/14/2026</a:t>
+              <a:t>06/15/2026</a:t>
             </a:fld>
             <a:endParaRPr lang="fr-MR"/>
           </a:p>
@@ -2634,7 +2639,7 @@
           <a:p>
             <a:fld id="{9B53EBB8-5D93-480B-8E51-8A5CAA849165}" type="datetimeFigureOut">
               <a:rPr lang="fr-MR" smtClean="0"/>
-              <a:t>06/14/2026</a:t>
+              <a:t>06/15/2026</a:t>
             </a:fld>
             <a:endParaRPr lang="fr-MR"/>
           </a:p>
@@ -2776,7 +2781,7 @@
           <a:p>
             <a:fld id="{9B53EBB8-5D93-480B-8E51-8A5CAA849165}" type="datetimeFigureOut">
               <a:rPr lang="fr-MR" smtClean="0"/>
-              <a:t>06/14/2026</a:t>
+              <a:t>06/15/2026</a:t>
             </a:fld>
             <a:endParaRPr lang="fr-MR"/>
           </a:p>
@@ -2889,7 +2894,7 @@
           <a:p>
             <a:fld id="{9B53EBB8-5D93-480B-8E51-8A5CAA849165}" type="datetimeFigureOut">
               <a:rPr lang="fr-MR" smtClean="0"/>
-              <a:t>06/14/2026</a:t>
+              <a:t>06/15/2026</a:t>
             </a:fld>
             <a:endParaRPr lang="fr-MR"/>
           </a:p>
@@ -3398,7 +3403,7 @@
           <a:p>
             <a:fld id="{9B53EBB8-5D93-480B-8E51-8A5CAA849165}" type="datetimeFigureOut">
               <a:rPr lang="fr-MR" smtClean="0"/>
-              <a:t>06/14/2026</a:t>
+              <a:t>06/15/2026</a:t>
             </a:fld>
             <a:endParaRPr lang="fr-MR"/>
           </a:p>
@@ -3687,7 +3692,7 @@
           <a:p>
             <a:fld id="{9B53EBB8-5D93-480B-8E51-8A5CAA849165}" type="datetimeFigureOut">
               <a:rPr lang="fr-MR" smtClean="0"/>
-              <a:t>06/14/2026</a:t>
+              <a:t>06/15/2026</a:t>
             </a:fld>
             <a:endParaRPr lang="fr-MR"/>
           </a:p>
@@ -3892,7 +3897,7 @@
           <a:p>
             <a:fld id="{9B53EBB8-5D93-480B-8E51-8A5CAA849165}" type="datetimeFigureOut">
               <a:rPr lang="fr-MR" smtClean="0"/>
-              <a:t>06/14/2026</a:t>
+              <a:t>06/15/2026</a:t>
             </a:fld>
             <a:endParaRPr lang="fr-MR"/>
           </a:p>
@@ -4102,7 +4107,7 @@
           <a:p>
             <a:fld id="{9B53EBB8-5D93-480B-8E51-8A5CAA849165}" type="datetimeFigureOut">
               <a:rPr lang="fr-MR" smtClean="0"/>
-              <a:t>06/14/2026</a:t>
+              <a:t>06/15/2026</a:t>
             </a:fld>
             <a:endParaRPr lang="fr-MR"/>
           </a:p>
@@ -6924,7 +6929,7 @@
           <a:p>
             <a:fld id="{9B53EBB8-5D93-480B-8E51-8A5CAA849165}" type="datetimeFigureOut">
               <a:rPr lang="fr-MR" smtClean="0"/>
-              <a:t>06/14/2026</a:t>
+              <a:t>06/15/2026</a:t>
             </a:fld>
             <a:endParaRPr lang="fr-MR"/>
           </a:p>
@@ -7645,7 +7650,13 @@
   <p:cSld>
     <p:spTree>
       <p:nvGrpSpPr>
-        <p:cNvPr id="1" name=""/>
+        <p:cNvPr id="1" name="">
+          <a:extLst>
+            <a:ext uri="{FF2B5EF4-FFF2-40B4-BE49-F238E27FC236}">
+              <a16:creationId xmlns:a16="http://schemas.microsoft.com/office/drawing/2014/main" id="{265F96FC-6B9D-4D75-D26A-AA1969EDC518}"/>
+            </a:ext>
+          </a:extLst>
+        </p:cNvPr>
         <p:cNvGrpSpPr/>
         <p:nvPr/>
       </p:nvGrpSpPr>
@@ -7662,7 +7673,7 @@
           <p:cNvPr id="5" name="Shape 0">
             <a:extLst>
               <a:ext uri="{FF2B5EF4-FFF2-40B4-BE49-F238E27FC236}">
-                <a16:creationId xmlns:a16="http://schemas.microsoft.com/office/drawing/2014/main" id="{130AD00A-EBB2-7493-772E-8F22B0BC782E}"/>
+                <a16:creationId xmlns:a16="http://schemas.microsoft.com/office/drawing/2014/main" id="{69173458-7822-270A-0515-1CACEDC8F079}"/>
               </a:ext>
             </a:extLst>
           </p:cNvPr>
@@ -7691,10 +7702,36 @@
           <a:bodyPr/>
           <a:lstStyle/>
           <a:p>
-            <a:endParaRPr lang="es-ES" dirty="0">
+            <a:pPr marL="0" marR="0" lvl="0" indent="0" algn="l" defTabSz="914400" rtl="0" eaLnBrk="1" fontAlgn="auto" latinLnBrk="0" hangingPunct="1">
+              <a:lnSpc>
+                <a:spcPct val="100000"/>
+              </a:lnSpc>
+              <a:spcBef>
+                <a:spcPts val="0"/>
+              </a:spcBef>
+              <a:spcAft>
+                <a:spcPts val="0"/>
+              </a:spcAft>
+              <a:buClrTx/>
+              <a:buSzTx/>
+              <a:buFontTx/>
+              <a:buNone/>
+              <a:tabLst/>
+              <a:defRPr/>
+            </a:pPr>
+            <a:endParaRPr kumimoji="0" lang="es-ES" sz="1800" b="0" i="0" u="none" strike="noStrike" kern="1200" cap="none" spc="0" normalizeH="0" baseline="0" noProof="0" dirty="0">
+              <a:ln>
+                <a:noFill/>
+              </a:ln>
               <a:solidFill>
-                <a:schemeClr val="bg1"/>
+                <a:prstClr val="white"/>
               </a:solidFill>
+              <a:effectLst/>
+              <a:uLnTx/>
+              <a:uFillTx/>
+              <a:latin typeface="Calibri" panose="020F0502020204030204"/>
+              <a:ea typeface="+mn-ea"/>
+              <a:cs typeface="+mn-cs"/>
             </a:endParaRPr>
           </a:p>
         </p:txBody>
@@ -7704,7 +7741,7 @@
           <p:cNvPr id="6" name="TextBox 5">
             <a:extLst>
               <a:ext uri="{FF2B5EF4-FFF2-40B4-BE49-F238E27FC236}">
-                <a16:creationId xmlns:a16="http://schemas.microsoft.com/office/drawing/2014/main" id="{93B3A6C5-B5B5-3970-565E-225CEA7A6A6A}"/>
+                <a16:creationId xmlns:a16="http://schemas.microsoft.com/office/drawing/2014/main" id="{E8413082-1665-FB80-838C-EECA9E7D9E5E}"/>
               </a:ext>
             </a:extLst>
           </p:cNvPr>
@@ -7713,8 +7750,8 @@
         </p:nvSpPr>
         <p:spPr>
           <a:xfrm>
-            <a:off x="339365" y="235670"/>
-            <a:ext cx="7032396" cy="584775"/>
+            <a:off x="546755" y="226243"/>
+            <a:ext cx="11249005" cy="584775"/>
           </a:xfrm>
           <a:prstGeom prst="rect">
             <a:avLst/>
@@ -7727,23 +7764,120 @@
           </a:bodyPr>
           <a:lstStyle/>
           <a:p>
+            <a:pPr lvl="0"/>
+            <a:r>
+              <a:rPr kumimoji="0" lang="es-ES" sz="3200" b="1" i="0" u="none" strike="noStrike" kern="1200" cap="none" spc="0" normalizeH="0" baseline="0" noProof="0" dirty="0">
+                <a:ln>
+                  <a:noFill/>
+                </a:ln>
+                <a:solidFill>
+                  <a:prstClr val="white"/>
+                </a:solidFill>
+                <a:effectLst/>
+                <a:uLnTx/>
+                <a:uFillTx/>
+                <a:latin typeface="Calibri" panose="020F0502020204030204"/>
+                <a:ea typeface="+mn-ea"/>
+                <a:cs typeface="+mn-cs"/>
+              </a:rPr>
+              <a:t>06 — </a:t>
+            </a:r>
+            <a:r>
+              <a:rPr kumimoji="0" lang="es-ES" sz="3200" b="1" i="0" u="none" strike="noStrike" kern="1200" cap="none" spc="0" normalizeH="0" baseline="0" noProof="0" dirty="0" err="1">
+                <a:ln>
+                  <a:noFill/>
+                </a:ln>
+                <a:solidFill>
+                  <a:prstClr val="white"/>
+                </a:solidFill>
+                <a:effectLst/>
+                <a:uLnTx/>
+                <a:uFillTx/>
+                <a:latin typeface="Calibri" panose="020F0502020204030204"/>
+                <a:ea typeface="+mn-ea"/>
+                <a:cs typeface="+mn-cs"/>
+              </a:rPr>
+              <a:t>Conceptions</a:t>
+            </a:r>
             <a:r>
               <a:rPr lang="es-ES" sz="3200" b="1" dirty="0">
                 <a:solidFill>
-                  <a:schemeClr val="bg1"/>
-                </a:solidFill>
-              </a:rPr>
-              <a:t>08 —  Démonstration</a:t>
-            </a:r>
-          </a:p>
-        </p:txBody>
-      </p:sp>
-      <p:sp>
-        <p:nvSpPr>
-          <p:cNvPr id="7" name="Shape 14">
-            <a:extLst>
-              <a:ext uri="{FF2B5EF4-FFF2-40B4-BE49-F238E27FC236}">
-                <a16:creationId xmlns:a16="http://schemas.microsoft.com/office/drawing/2014/main" id="{B4ED0B7F-9464-AFAA-8896-A8BAA3D014F8}"/>
+                  <a:prstClr val="white"/>
+                </a:solidFill>
+              </a:rPr>
+              <a:t> - </a:t>
+            </a:r>
+            <a:r>
+              <a:rPr lang="es-ES" sz="3200" b="1" dirty="0" err="1">
+                <a:solidFill>
+                  <a:prstClr val="white"/>
+                </a:solidFill>
+              </a:rPr>
+              <a:t>Diagrammes</a:t>
+            </a:r>
+            <a:r>
+              <a:rPr lang="es-ES" sz="3200" b="1" dirty="0">
+                <a:solidFill>
+                  <a:prstClr val="white"/>
+                </a:solidFill>
+              </a:rPr>
+              <a:t> de </a:t>
+            </a:r>
+            <a:r>
+              <a:rPr lang="es-ES" sz="3200" b="1" dirty="0" err="1">
+                <a:solidFill>
+                  <a:prstClr val="white"/>
+                </a:solidFill>
+              </a:rPr>
+              <a:t>Séquence</a:t>
+            </a:r>
+            <a:r>
+              <a:rPr lang="es-ES" sz="3200" b="1" dirty="0">
+                <a:solidFill>
+                  <a:prstClr val="white"/>
+                </a:solidFill>
+              </a:rPr>
+              <a:t> (</a:t>
+            </a:r>
+            <a:r>
+              <a:rPr lang="es-ES" sz="3200" b="1" dirty="0" err="1">
+                <a:solidFill>
+                  <a:prstClr val="white"/>
+                </a:solidFill>
+              </a:rPr>
+              <a:t>Authentification</a:t>
+            </a:r>
+            <a:r>
+              <a:rPr lang="es-ES" sz="3200" b="1" dirty="0">
+                <a:solidFill>
+                  <a:prstClr val="white"/>
+                </a:solidFill>
+              </a:rPr>
+              <a:t>)</a:t>
+            </a:r>
+            <a:endParaRPr kumimoji="0" lang="es-ES" sz="3200" b="1" i="0" u="none" strike="noStrike" kern="1200" cap="none" spc="0" normalizeH="0" baseline="0" noProof="0" dirty="0">
+              <a:ln>
+                <a:noFill/>
+              </a:ln>
+              <a:solidFill>
+                <a:prstClr val="white"/>
+              </a:solidFill>
+              <a:effectLst/>
+              <a:uLnTx/>
+              <a:uFillTx/>
+              <a:latin typeface="Calibri" panose="020F0502020204030204"/>
+              <a:ea typeface="+mn-ea"/>
+              <a:cs typeface="+mn-cs"/>
+            </a:endParaRPr>
+          </a:p>
+        </p:txBody>
+      </p:sp>
+      <p:sp>
+        <p:nvSpPr>
+          <p:cNvPr id="8" name="Shape 14">
+            <a:extLst>
+              <a:ext uri="{FF2B5EF4-FFF2-40B4-BE49-F238E27FC236}">
+                <a16:creationId xmlns:a16="http://schemas.microsoft.com/office/drawing/2014/main" id="{860DE342-F8DF-C750-3EAE-1E7AF9A48289}"/>
               </a:ext>
             </a:extLst>
           </p:cNvPr>
@@ -7752,7 +7886,7 @@
         </p:nvSpPr>
         <p:spPr>
           <a:xfrm>
-            <a:off x="11482791" y="6331984"/>
+            <a:off x="11445083" y="6294277"/>
             <a:ext cx="502920" cy="365760"/>
           </a:xfrm>
           <a:prstGeom prst="rect">
@@ -7772,34 +7906,77 @@
           <a:bodyPr/>
           <a:lstStyle/>
           <a:p>
-            <a:r>
-              <a:rPr lang="es-ES" sz="1800" b="1" dirty="0">
-                <a:solidFill>
-                  <a:schemeClr val="bg1"/>
-                </a:solidFill>
-              </a:rPr>
-              <a:t>  </a:t>
-            </a:r>
-            <a:r>
-              <a:rPr lang="es-ES" b="1" dirty="0">
-                <a:solidFill>
-                  <a:schemeClr val="bg1"/>
-                </a:solidFill>
-              </a:rPr>
-              <a:t>9</a:t>
-            </a:r>
-            <a:endParaRPr lang="es-ES" sz="1800" b="1" dirty="0">
-              <a:solidFill>
-                <a:schemeClr val="bg1"/>
-              </a:solidFill>
-            </a:endParaRPr>
-          </a:p>
-        </p:txBody>
-      </p:sp>
+            <a:pPr marL="0" marR="0" lvl="0" indent="0" algn="l" defTabSz="914400" rtl="0" eaLnBrk="1" fontAlgn="auto" latinLnBrk="0" hangingPunct="1">
+              <a:lnSpc>
+                <a:spcPct val="100000"/>
+              </a:lnSpc>
+              <a:spcBef>
+                <a:spcPts val="0"/>
+              </a:spcBef>
+              <a:spcAft>
+                <a:spcPts val="0"/>
+              </a:spcAft>
+              <a:buClrTx/>
+              <a:buSzTx/>
+              <a:buFontTx/>
+              <a:buNone/>
+              <a:tabLst/>
+              <a:defRPr/>
+            </a:pPr>
+            <a:r>
+              <a:rPr kumimoji="0" lang="es-ES" sz="1800" b="1" i="0" u="none" strike="noStrike" kern="1200" cap="none" spc="0" normalizeH="0" baseline="0" noProof="0" dirty="0">
+                <a:ln>
+                  <a:noFill/>
+                </a:ln>
+                <a:solidFill>
+                  <a:prstClr val="white"/>
+                </a:solidFill>
+                <a:effectLst/>
+                <a:uLnTx/>
+                <a:uFillTx/>
+                <a:latin typeface="Calibri" panose="020F0502020204030204"/>
+                <a:ea typeface="+mn-ea"/>
+                <a:cs typeface="+mn-cs"/>
+              </a:rPr>
+              <a:t>  7</a:t>
+            </a:r>
+          </a:p>
+        </p:txBody>
+      </p:sp>
+      <p:pic>
+        <p:nvPicPr>
+          <p:cNvPr id="3" name="Picture 2">
+            <a:extLst>
+              <a:ext uri="{FF2B5EF4-FFF2-40B4-BE49-F238E27FC236}">
+                <a16:creationId xmlns:a16="http://schemas.microsoft.com/office/drawing/2014/main" id="{046B6C8C-4FF1-C9A6-911F-1E93A005FC9A}"/>
+              </a:ext>
+            </a:extLst>
+          </p:cNvPr>
+          <p:cNvPicPr>
+            <a:picLocks noChangeAspect="1"/>
+          </p:cNvPicPr>
+          <p:nvPr/>
+        </p:nvPicPr>
+        <p:blipFill>
+          <a:blip r:embed="rId2"/>
+          <a:stretch>
+            <a:fillRect/>
+          </a:stretch>
+        </p:blipFill>
+        <p:spPr>
+          <a:xfrm>
+            <a:off x="1757939" y="1058677"/>
+            <a:ext cx="8676122" cy="5799323"/>
+          </a:xfrm>
+          <a:prstGeom prst="rect">
+            <a:avLst/>
+          </a:prstGeom>
+        </p:spPr>
+      </p:pic>
     </p:spTree>
     <p:extLst>
       <p:ext uri="{BB962C8B-B14F-4D97-AF65-F5344CB8AC3E}">
-        <p14:creationId xmlns:p14="http://schemas.microsoft.com/office/powerpoint/2010/main" val="248430642"/>
+        <p14:creationId xmlns:p14="http://schemas.microsoft.com/office/powerpoint/2010/main" val="1632288633"/>
       </p:ext>
     </p:extLst>
   </p:cSld>
@@ -7810,6 +7987,916 @@
 </file>
 
 <file path=ppt/slides/slide11.xml><?xml version="1.0" encoding="utf-8"?>
+<p:sld xmlns:a="http://schemas.openxmlformats.org/drawingml/2006/main" xmlns:r="http://schemas.openxmlformats.org/officeDocument/2006/relationships" xmlns:p="http://schemas.openxmlformats.org/presentationml/2006/main">
+  <p:cSld>
+    <p:spTree>
+      <p:nvGrpSpPr>
+        <p:cNvPr id="1" name="">
+          <a:extLst>
+            <a:ext uri="{FF2B5EF4-FFF2-40B4-BE49-F238E27FC236}">
+              <a16:creationId xmlns:a16="http://schemas.microsoft.com/office/drawing/2014/main" id="{DBE12230-2C15-D813-D58D-3525B1F818A3}"/>
+            </a:ext>
+          </a:extLst>
+        </p:cNvPr>
+        <p:cNvGrpSpPr/>
+        <p:nvPr/>
+      </p:nvGrpSpPr>
+      <p:grpSpPr>
+        <a:xfrm>
+          <a:off x="0" y="0"/>
+          <a:ext cx="0" cy="0"/>
+          <a:chOff x="0" y="0"/>
+          <a:chExt cx="0" cy="0"/>
+        </a:xfrm>
+      </p:grpSpPr>
+      <p:sp>
+        <p:nvSpPr>
+          <p:cNvPr id="5" name="Shape 0">
+            <a:extLst>
+              <a:ext uri="{FF2B5EF4-FFF2-40B4-BE49-F238E27FC236}">
+                <a16:creationId xmlns:a16="http://schemas.microsoft.com/office/drawing/2014/main" id="{6A46FEB4-C1AB-6769-423A-040AFBE30099}"/>
+              </a:ext>
+            </a:extLst>
+          </p:cNvPr>
+          <p:cNvSpPr/>
+          <p:nvPr/>
+        </p:nvSpPr>
+        <p:spPr>
+          <a:xfrm>
+            <a:off x="0" y="0"/>
+            <a:ext cx="12192000" cy="1005840"/>
+          </a:xfrm>
+          <a:prstGeom prst="rect">
+            <a:avLst/>
+          </a:prstGeom>
+          <a:solidFill>
+            <a:srgbClr val="1E3A5F"/>
+          </a:solidFill>
+          <a:ln w="12700">
+            <a:solidFill>
+              <a:srgbClr val="1E3A5F"/>
+            </a:solidFill>
+            <a:prstDash val="solid"/>
+          </a:ln>
+        </p:spPr>
+        <p:txBody>
+          <a:bodyPr/>
+          <a:lstStyle/>
+          <a:p>
+            <a:pPr marL="0" marR="0" lvl="0" indent="0" algn="l" defTabSz="914400" rtl="0" eaLnBrk="1" fontAlgn="auto" latinLnBrk="0" hangingPunct="1">
+              <a:lnSpc>
+                <a:spcPct val="100000"/>
+              </a:lnSpc>
+              <a:spcBef>
+                <a:spcPts val="0"/>
+              </a:spcBef>
+              <a:spcAft>
+                <a:spcPts val="0"/>
+              </a:spcAft>
+              <a:buClrTx/>
+              <a:buSzTx/>
+              <a:buFontTx/>
+              <a:buNone/>
+              <a:tabLst/>
+              <a:defRPr/>
+            </a:pPr>
+            <a:endParaRPr kumimoji="0" lang="es-ES" sz="1800" b="0" i="0" u="none" strike="noStrike" kern="1200" cap="none" spc="0" normalizeH="0" baseline="0" noProof="0" dirty="0">
+              <a:ln>
+                <a:noFill/>
+              </a:ln>
+              <a:solidFill>
+                <a:prstClr val="white"/>
+              </a:solidFill>
+              <a:effectLst/>
+              <a:uLnTx/>
+              <a:uFillTx/>
+              <a:latin typeface="Calibri" panose="020F0502020204030204"/>
+              <a:ea typeface="+mn-ea"/>
+              <a:cs typeface="+mn-cs"/>
+            </a:endParaRPr>
+          </a:p>
+        </p:txBody>
+      </p:sp>
+      <p:sp>
+        <p:nvSpPr>
+          <p:cNvPr id="6" name="TextBox 5">
+            <a:extLst>
+              <a:ext uri="{FF2B5EF4-FFF2-40B4-BE49-F238E27FC236}">
+                <a16:creationId xmlns:a16="http://schemas.microsoft.com/office/drawing/2014/main" id="{D6CC93EE-D943-0242-C7CA-C2679DBB0C73}"/>
+              </a:ext>
+            </a:extLst>
+          </p:cNvPr>
+          <p:cNvSpPr txBox="1"/>
+          <p:nvPr/>
+        </p:nvSpPr>
+        <p:spPr>
+          <a:xfrm>
+            <a:off x="546755" y="226243"/>
+            <a:ext cx="11259165" cy="584775"/>
+          </a:xfrm>
+          <a:prstGeom prst="rect">
+            <a:avLst/>
+          </a:prstGeom>
+          <a:noFill/>
+        </p:spPr>
+        <p:txBody>
+          <a:bodyPr wrap="square" rtlCol="0">
+            <a:spAutoFit/>
+          </a:bodyPr>
+          <a:lstStyle/>
+          <a:p>
+            <a:pPr lvl="0"/>
+            <a:r>
+              <a:rPr kumimoji="0" lang="es-ES" sz="3200" b="1" i="0" u="none" strike="noStrike" kern="1200" cap="none" spc="0" normalizeH="0" baseline="0" noProof="0" dirty="0">
+                <a:ln>
+                  <a:noFill/>
+                </a:ln>
+                <a:solidFill>
+                  <a:prstClr val="white"/>
+                </a:solidFill>
+                <a:effectLst/>
+                <a:uLnTx/>
+                <a:uFillTx/>
+                <a:latin typeface="Calibri" panose="020F0502020204030204"/>
+                <a:ea typeface="+mn-ea"/>
+                <a:cs typeface="+mn-cs"/>
+              </a:rPr>
+              <a:t>06 — </a:t>
+            </a:r>
+            <a:r>
+              <a:rPr lang="fr-FR" sz="3200" b="1" dirty="0">
+                <a:solidFill>
+                  <a:prstClr val="white"/>
+                </a:solidFill>
+              </a:rPr>
+              <a:t>Création d'une Association (Validation Admin)</a:t>
+            </a:r>
+            <a:endParaRPr kumimoji="0" lang="es-ES" sz="3200" b="1" i="0" u="none" strike="noStrike" kern="1200" cap="none" spc="0" normalizeH="0" baseline="0" noProof="0" dirty="0">
+              <a:ln>
+                <a:noFill/>
+              </a:ln>
+              <a:solidFill>
+                <a:prstClr val="white"/>
+              </a:solidFill>
+              <a:effectLst/>
+              <a:uLnTx/>
+              <a:uFillTx/>
+              <a:latin typeface="Calibri" panose="020F0502020204030204"/>
+              <a:ea typeface="+mn-ea"/>
+              <a:cs typeface="+mn-cs"/>
+            </a:endParaRPr>
+          </a:p>
+        </p:txBody>
+      </p:sp>
+      <p:sp>
+        <p:nvSpPr>
+          <p:cNvPr id="8" name="Shape 14">
+            <a:extLst>
+              <a:ext uri="{FF2B5EF4-FFF2-40B4-BE49-F238E27FC236}">
+                <a16:creationId xmlns:a16="http://schemas.microsoft.com/office/drawing/2014/main" id="{D237C34F-DA4E-F162-C262-FB818DB3A5FA}"/>
+              </a:ext>
+            </a:extLst>
+          </p:cNvPr>
+          <p:cNvSpPr/>
+          <p:nvPr/>
+        </p:nvSpPr>
+        <p:spPr>
+          <a:xfrm>
+            <a:off x="11445083" y="6294277"/>
+            <a:ext cx="502920" cy="365760"/>
+          </a:xfrm>
+          <a:prstGeom prst="rect">
+            <a:avLst/>
+          </a:prstGeom>
+          <a:solidFill>
+            <a:srgbClr val="1E3A5F"/>
+          </a:solidFill>
+          <a:ln w="12700">
+            <a:solidFill>
+              <a:srgbClr val="1E3A5F"/>
+            </a:solidFill>
+            <a:prstDash val="solid"/>
+          </a:ln>
+        </p:spPr>
+        <p:txBody>
+          <a:bodyPr/>
+          <a:lstStyle/>
+          <a:p>
+            <a:pPr marL="0" marR="0" lvl="0" indent="0" algn="l" defTabSz="914400" rtl="0" eaLnBrk="1" fontAlgn="auto" latinLnBrk="0" hangingPunct="1">
+              <a:lnSpc>
+                <a:spcPct val="100000"/>
+              </a:lnSpc>
+              <a:spcBef>
+                <a:spcPts val="0"/>
+              </a:spcBef>
+              <a:spcAft>
+                <a:spcPts val="0"/>
+              </a:spcAft>
+              <a:buClrTx/>
+              <a:buSzTx/>
+              <a:buFontTx/>
+              <a:buNone/>
+              <a:tabLst/>
+              <a:defRPr/>
+            </a:pPr>
+            <a:r>
+              <a:rPr kumimoji="0" lang="es-ES" sz="1800" b="1" i="0" u="none" strike="noStrike" kern="1200" cap="none" spc="0" normalizeH="0" baseline="0" noProof="0" dirty="0">
+                <a:ln>
+                  <a:noFill/>
+                </a:ln>
+                <a:solidFill>
+                  <a:prstClr val="white"/>
+                </a:solidFill>
+                <a:effectLst/>
+                <a:uLnTx/>
+                <a:uFillTx/>
+                <a:latin typeface="Calibri" panose="020F0502020204030204"/>
+                <a:ea typeface="+mn-ea"/>
+                <a:cs typeface="+mn-cs"/>
+              </a:rPr>
+              <a:t>  7</a:t>
+            </a:r>
+          </a:p>
+        </p:txBody>
+      </p:sp>
+      <p:pic>
+        <p:nvPicPr>
+          <p:cNvPr id="3" name="Picture 2">
+            <a:extLst>
+              <a:ext uri="{FF2B5EF4-FFF2-40B4-BE49-F238E27FC236}">
+                <a16:creationId xmlns:a16="http://schemas.microsoft.com/office/drawing/2014/main" id="{A527BAC0-5368-0870-F48D-5C2495874A53}"/>
+              </a:ext>
+            </a:extLst>
+          </p:cNvPr>
+          <p:cNvPicPr>
+            <a:picLocks noChangeAspect="1"/>
+          </p:cNvPicPr>
+          <p:nvPr/>
+        </p:nvPicPr>
+        <p:blipFill>
+          <a:blip r:embed="rId2"/>
+          <a:stretch>
+            <a:fillRect/>
+          </a:stretch>
+        </p:blipFill>
+        <p:spPr>
+          <a:xfrm>
+            <a:off x="1742698" y="1714351"/>
+            <a:ext cx="8706604" cy="3429297"/>
+          </a:xfrm>
+          <a:prstGeom prst="rect">
+            <a:avLst/>
+          </a:prstGeom>
+        </p:spPr>
+      </p:pic>
+    </p:spTree>
+    <p:extLst>
+      <p:ext uri="{BB962C8B-B14F-4D97-AF65-F5344CB8AC3E}">
+        <p14:creationId xmlns:p14="http://schemas.microsoft.com/office/powerpoint/2010/main" val="3310332224"/>
+      </p:ext>
+    </p:extLst>
+  </p:cSld>
+  <p:clrMapOvr>
+    <a:masterClrMapping/>
+  </p:clrMapOvr>
+</p:sld>
+</file>
+
+<file path=ppt/slides/slide12.xml><?xml version="1.0" encoding="utf-8"?>
+<p:sld xmlns:a="http://schemas.openxmlformats.org/drawingml/2006/main" xmlns:r="http://schemas.openxmlformats.org/officeDocument/2006/relationships" xmlns:p="http://schemas.openxmlformats.org/presentationml/2006/main">
+  <p:cSld>
+    <p:spTree>
+      <p:nvGrpSpPr>
+        <p:cNvPr id="1" name="">
+          <a:extLst>
+            <a:ext uri="{FF2B5EF4-FFF2-40B4-BE49-F238E27FC236}">
+              <a16:creationId xmlns:a16="http://schemas.microsoft.com/office/drawing/2014/main" id="{E9B29780-A682-FD68-B958-19B98DC6396C}"/>
+            </a:ext>
+          </a:extLst>
+        </p:cNvPr>
+        <p:cNvGrpSpPr/>
+        <p:nvPr/>
+      </p:nvGrpSpPr>
+      <p:grpSpPr>
+        <a:xfrm>
+          <a:off x="0" y="0"/>
+          <a:ext cx="0" cy="0"/>
+          <a:chOff x="0" y="0"/>
+          <a:chExt cx="0" cy="0"/>
+        </a:xfrm>
+      </p:grpSpPr>
+      <p:sp>
+        <p:nvSpPr>
+          <p:cNvPr id="5" name="Shape 0">
+            <a:extLst>
+              <a:ext uri="{FF2B5EF4-FFF2-40B4-BE49-F238E27FC236}">
+                <a16:creationId xmlns:a16="http://schemas.microsoft.com/office/drawing/2014/main" id="{E56DBA30-665D-3F9B-658B-EE40A8C4EE3A}"/>
+              </a:ext>
+            </a:extLst>
+          </p:cNvPr>
+          <p:cNvSpPr/>
+          <p:nvPr/>
+        </p:nvSpPr>
+        <p:spPr>
+          <a:xfrm>
+            <a:off x="0" y="0"/>
+            <a:ext cx="12192000" cy="1005840"/>
+          </a:xfrm>
+          <a:prstGeom prst="rect">
+            <a:avLst/>
+          </a:prstGeom>
+          <a:solidFill>
+            <a:srgbClr val="1E3A5F"/>
+          </a:solidFill>
+          <a:ln w="12700">
+            <a:solidFill>
+              <a:srgbClr val="1E3A5F"/>
+            </a:solidFill>
+            <a:prstDash val="solid"/>
+          </a:ln>
+        </p:spPr>
+        <p:txBody>
+          <a:bodyPr/>
+          <a:lstStyle/>
+          <a:p>
+            <a:pPr marL="0" marR="0" lvl="0" indent="0" algn="l" defTabSz="914400" rtl="0" eaLnBrk="1" fontAlgn="auto" latinLnBrk="0" hangingPunct="1">
+              <a:lnSpc>
+                <a:spcPct val="100000"/>
+              </a:lnSpc>
+              <a:spcBef>
+                <a:spcPts val="0"/>
+              </a:spcBef>
+              <a:spcAft>
+                <a:spcPts val="0"/>
+              </a:spcAft>
+              <a:buClrTx/>
+              <a:buSzTx/>
+              <a:buFontTx/>
+              <a:buNone/>
+              <a:tabLst/>
+              <a:defRPr/>
+            </a:pPr>
+            <a:endParaRPr kumimoji="0" lang="es-ES" sz="1800" b="0" i="0" u="none" strike="noStrike" kern="1200" cap="none" spc="0" normalizeH="0" baseline="0" noProof="0" dirty="0">
+              <a:ln>
+                <a:noFill/>
+              </a:ln>
+              <a:solidFill>
+                <a:prstClr val="white"/>
+              </a:solidFill>
+              <a:effectLst/>
+              <a:uLnTx/>
+              <a:uFillTx/>
+              <a:latin typeface="Calibri" panose="020F0502020204030204"/>
+              <a:ea typeface="+mn-ea"/>
+              <a:cs typeface="+mn-cs"/>
+            </a:endParaRPr>
+          </a:p>
+        </p:txBody>
+      </p:sp>
+      <p:sp>
+        <p:nvSpPr>
+          <p:cNvPr id="6" name="TextBox 5">
+            <a:extLst>
+              <a:ext uri="{FF2B5EF4-FFF2-40B4-BE49-F238E27FC236}">
+                <a16:creationId xmlns:a16="http://schemas.microsoft.com/office/drawing/2014/main" id="{F31BD804-83B5-1E0B-3FD1-03CD6D3B9875}"/>
+              </a:ext>
+            </a:extLst>
+          </p:cNvPr>
+          <p:cNvSpPr txBox="1"/>
+          <p:nvPr/>
+        </p:nvSpPr>
+        <p:spPr>
+          <a:xfrm>
+            <a:off x="546755" y="226243"/>
+            <a:ext cx="8185765" cy="584775"/>
+          </a:xfrm>
+          <a:prstGeom prst="rect">
+            <a:avLst/>
+          </a:prstGeom>
+          <a:noFill/>
+        </p:spPr>
+        <p:txBody>
+          <a:bodyPr wrap="square" rtlCol="0">
+            <a:spAutoFit/>
+          </a:bodyPr>
+          <a:lstStyle/>
+          <a:p>
+            <a:pPr lvl="0"/>
+            <a:r>
+              <a:rPr kumimoji="0" lang="es-ES" sz="3200" b="1" i="0" u="none" strike="noStrike" kern="1200" cap="none" spc="0" normalizeH="0" baseline="0" noProof="0" dirty="0">
+                <a:ln>
+                  <a:noFill/>
+                </a:ln>
+                <a:solidFill>
+                  <a:prstClr val="white"/>
+                </a:solidFill>
+                <a:effectLst/>
+                <a:uLnTx/>
+                <a:uFillTx/>
+                <a:latin typeface="Calibri" panose="020F0502020204030204"/>
+                <a:ea typeface="+mn-ea"/>
+                <a:cs typeface="+mn-cs"/>
+              </a:rPr>
+              <a:t>06 — </a:t>
+            </a:r>
+            <a:r>
+              <a:rPr kumimoji="0" lang="es-ES" sz="3200" b="1" i="0" u="none" strike="noStrike" kern="1200" cap="none" spc="0" normalizeH="0" baseline="0" noProof="0" dirty="0" err="1">
+                <a:ln>
+                  <a:noFill/>
+                </a:ln>
+                <a:solidFill>
+                  <a:prstClr val="white"/>
+                </a:solidFill>
+                <a:effectLst/>
+                <a:uLnTx/>
+                <a:uFillTx/>
+                <a:latin typeface="Calibri" panose="020F0502020204030204"/>
+                <a:ea typeface="+mn-ea"/>
+                <a:cs typeface="+mn-cs"/>
+              </a:rPr>
+              <a:t>Conceptions</a:t>
+            </a:r>
+            <a:r>
+              <a:rPr lang="es-ES" sz="3200" b="1" dirty="0">
+                <a:solidFill>
+                  <a:prstClr val="white"/>
+                </a:solidFill>
+              </a:rPr>
+              <a:t> - </a:t>
+            </a:r>
+            <a:r>
+              <a:rPr lang="es-ES" sz="3200" b="1" dirty="0" err="1">
+                <a:solidFill>
+                  <a:prstClr val="white"/>
+                </a:solidFill>
+              </a:rPr>
+              <a:t>Création</a:t>
+            </a:r>
+            <a:r>
+              <a:rPr lang="es-ES" sz="3200" b="1" dirty="0">
+                <a:solidFill>
+                  <a:prstClr val="white"/>
+                </a:solidFill>
+              </a:rPr>
+              <a:t> </a:t>
+            </a:r>
+            <a:r>
+              <a:rPr lang="es-ES" sz="3200" b="1" dirty="0" err="1">
+                <a:solidFill>
+                  <a:prstClr val="white"/>
+                </a:solidFill>
+              </a:rPr>
+              <a:t>d'Événement</a:t>
+            </a:r>
+            <a:endParaRPr kumimoji="0" lang="es-ES" sz="3200" b="1" i="0" u="none" strike="noStrike" kern="1200" cap="none" spc="0" normalizeH="0" baseline="0" noProof="0" dirty="0">
+              <a:ln>
+                <a:noFill/>
+              </a:ln>
+              <a:solidFill>
+                <a:prstClr val="white"/>
+              </a:solidFill>
+              <a:effectLst/>
+              <a:uLnTx/>
+              <a:uFillTx/>
+              <a:latin typeface="Calibri" panose="020F0502020204030204"/>
+              <a:ea typeface="+mn-ea"/>
+              <a:cs typeface="+mn-cs"/>
+            </a:endParaRPr>
+          </a:p>
+        </p:txBody>
+      </p:sp>
+      <p:sp>
+        <p:nvSpPr>
+          <p:cNvPr id="8" name="Shape 14">
+            <a:extLst>
+              <a:ext uri="{FF2B5EF4-FFF2-40B4-BE49-F238E27FC236}">
+                <a16:creationId xmlns:a16="http://schemas.microsoft.com/office/drawing/2014/main" id="{0C7F2467-2C10-C9E2-549E-744B2ABBD771}"/>
+              </a:ext>
+            </a:extLst>
+          </p:cNvPr>
+          <p:cNvSpPr/>
+          <p:nvPr/>
+        </p:nvSpPr>
+        <p:spPr>
+          <a:xfrm>
+            <a:off x="11445083" y="6294277"/>
+            <a:ext cx="502920" cy="365760"/>
+          </a:xfrm>
+          <a:prstGeom prst="rect">
+            <a:avLst/>
+          </a:prstGeom>
+          <a:solidFill>
+            <a:srgbClr val="1E3A5F"/>
+          </a:solidFill>
+          <a:ln w="12700">
+            <a:solidFill>
+              <a:srgbClr val="1E3A5F"/>
+            </a:solidFill>
+            <a:prstDash val="solid"/>
+          </a:ln>
+        </p:spPr>
+        <p:txBody>
+          <a:bodyPr/>
+          <a:lstStyle/>
+          <a:p>
+            <a:pPr marL="0" marR="0" lvl="0" indent="0" algn="l" defTabSz="914400" rtl="0" eaLnBrk="1" fontAlgn="auto" latinLnBrk="0" hangingPunct="1">
+              <a:lnSpc>
+                <a:spcPct val="100000"/>
+              </a:lnSpc>
+              <a:spcBef>
+                <a:spcPts val="0"/>
+              </a:spcBef>
+              <a:spcAft>
+                <a:spcPts val="0"/>
+              </a:spcAft>
+              <a:buClrTx/>
+              <a:buSzTx/>
+              <a:buFontTx/>
+              <a:buNone/>
+              <a:tabLst/>
+              <a:defRPr/>
+            </a:pPr>
+            <a:r>
+              <a:rPr kumimoji="0" lang="es-ES" sz="1800" b="1" i="0" u="none" strike="noStrike" kern="1200" cap="none" spc="0" normalizeH="0" baseline="0" noProof="0" dirty="0">
+                <a:ln>
+                  <a:noFill/>
+                </a:ln>
+                <a:solidFill>
+                  <a:prstClr val="white"/>
+                </a:solidFill>
+                <a:effectLst/>
+                <a:uLnTx/>
+                <a:uFillTx/>
+                <a:latin typeface="Calibri" panose="020F0502020204030204"/>
+                <a:ea typeface="+mn-ea"/>
+                <a:cs typeface="+mn-cs"/>
+              </a:rPr>
+              <a:t>  7</a:t>
+            </a:r>
+          </a:p>
+        </p:txBody>
+      </p:sp>
+      <p:pic>
+        <p:nvPicPr>
+          <p:cNvPr id="3" name="Picture 2">
+            <a:extLst>
+              <a:ext uri="{FF2B5EF4-FFF2-40B4-BE49-F238E27FC236}">
+                <a16:creationId xmlns:a16="http://schemas.microsoft.com/office/drawing/2014/main" id="{B7995752-7FA3-5747-7D2E-37CB3E398DD9}"/>
+              </a:ext>
+            </a:extLst>
+          </p:cNvPr>
+          <p:cNvPicPr>
+            <a:picLocks noChangeAspect="1"/>
+          </p:cNvPicPr>
+          <p:nvPr/>
+        </p:nvPicPr>
+        <p:blipFill>
+          <a:blip r:embed="rId2"/>
+          <a:stretch>
+            <a:fillRect/>
+          </a:stretch>
+        </p:blipFill>
+        <p:spPr>
+          <a:xfrm>
+            <a:off x="1805568" y="1742929"/>
+            <a:ext cx="8580864" cy="3372142"/>
+          </a:xfrm>
+          <a:prstGeom prst="rect">
+            <a:avLst/>
+          </a:prstGeom>
+        </p:spPr>
+      </p:pic>
+    </p:spTree>
+    <p:extLst>
+      <p:ext uri="{BB962C8B-B14F-4D97-AF65-F5344CB8AC3E}">
+        <p14:creationId xmlns:p14="http://schemas.microsoft.com/office/powerpoint/2010/main" val="3804654400"/>
+      </p:ext>
+    </p:extLst>
+  </p:cSld>
+  <p:clrMapOvr>
+    <a:masterClrMapping/>
+  </p:clrMapOvr>
+</p:sld>
+</file>
+
+<file path=ppt/slides/slide13.xml><?xml version="1.0" encoding="utf-8"?>
+<p:sld xmlns:a="http://schemas.openxmlformats.org/drawingml/2006/main" xmlns:r="http://schemas.openxmlformats.org/officeDocument/2006/relationships" xmlns:p="http://schemas.openxmlformats.org/presentationml/2006/main">
+  <p:cSld>
+    <p:spTree>
+      <p:nvGrpSpPr>
+        <p:cNvPr id="1" name="">
+          <a:extLst>
+            <a:ext uri="{FF2B5EF4-FFF2-40B4-BE49-F238E27FC236}">
+              <a16:creationId xmlns:a16="http://schemas.microsoft.com/office/drawing/2014/main" id="{642A932F-4865-653F-1F40-195F1D5305F3}"/>
+            </a:ext>
+          </a:extLst>
+        </p:cNvPr>
+        <p:cNvGrpSpPr/>
+        <p:nvPr/>
+      </p:nvGrpSpPr>
+      <p:grpSpPr>
+        <a:xfrm>
+          <a:off x="0" y="0"/>
+          <a:ext cx="0" cy="0"/>
+          <a:chOff x="0" y="0"/>
+          <a:chExt cx="0" cy="0"/>
+        </a:xfrm>
+      </p:grpSpPr>
+      <p:sp>
+        <p:nvSpPr>
+          <p:cNvPr id="5" name="Shape 0">
+            <a:extLst>
+              <a:ext uri="{FF2B5EF4-FFF2-40B4-BE49-F238E27FC236}">
+                <a16:creationId xmlns:a16="http://schemas.microsoft.com/office/drawing/2014/main" id="{678CF5EC-ADE0-DA53-B840-B8D3105550BA}"/>
+              </a:ext>
+            </a:extLst>
+          </p:cNvPr>
+          <p:cNvSpPr/>
+          <p:nvPr/>
+        </p:nvSpPr>
+        <p:spPr>
+          <a:xfrm>
+            <a:off x="0" y="0"/>
+            <a:ext cx="12192000" cy="1005840"/>
+          </a:xfrm>
+          <a:prstGeom prst="rect">
+            <a:avLst/>
+          </a:prstGeom>
+          <a:solidFill>
+            <a:srgbClr val="1E3A5F"/>
+          </a:solidFill>
+          <a:ln w="12700">
+            <a:solidFill>
+              <a:srgbClr val="1E3A5F"/>
+            </a:solidFill>
+            <a:prstDash val="solid"/>
+          </a:ln>
+        </p:spPr>
+        <p:txBody>
+          <a:bodyPr/>
+          <a:lstStyle/>
+          <a:p>
+            <a:pPr marL="0" marR="0" lvl="0" indent="0" algn="l" defTabSz="914400" rtl="0" eaLnBrk="1" fontAlgn="auto" latinLnBrk="0" hangingPunct="1">
+              <a:lnSpc>
+                <a:spcPct val="100000"/>
+              </a:lnSpc>
+              <a:spcBef>
+                <a:spcPts val="0"/>
+              </a:spcBef>
+              <a:spcAft>
+                <a:spcPts val="0"/>
+              </a:spcAft>
+              <a:buClrTx/>
+              <a:buSzTx/>
+              <a:buFontTx/>
+              <a:buNone/>
+              <a:tabLst/>
+              <a:defRPr/>
+            </a:pPr>
+            <a:endParaRPr kumimoji="0" lang="es-ES" sz="1800" b="0" i="0" u="none" strike="noStrike" kern="1200" cap="none" spc="0" normalizeH="0" baseline="0" noProof="0" dirty="0">
+              <a:ln>
+                <a:noFill/>
+              </a:ln>
+              <a:solidFill>
+                <a:prstClr val="white"/>
+              </a:solidFill>
+              <a:effectLst/>
+              <a:uLnTx/>
+              <a:uFillTx/>
+              <a:latin typeface="Calibri" panose="020F0502020204030204"/>
+              <a:ea typeface="+mn-ea"/>
+              <a:cs typeface="+mn-cs"/>
+            </a:endParaRPr>
+          </a:p>
+        </p:txBody>
+      </p:sp>
+      <p:sp>
+        <p:nvSpPr>
+          <p:cNvPr id="6" name="TextBox 5">
+            <a:extLst>
+              <a:ext uri="{FF2B5EF4-FFF2-40B4-BE49-F238E27FC236}">
+                <a16:creationId xmlns:a16="http://schemas.microsoft.com/office/drawing/2014/main" id="{C500945A-3DE3-1EAE-8B34-B2A7B19A30A0}"/>
+              </a:ext>
+            </a:extLst>
+          </p:cNvPr>
+          <p:cNvSpPr txBox="1"/>
+          <p:nvPr/>
+        </p:nvSpPr>
+        <p:spPr>
+          <a:xfrm>
+            <a:off x="546755" y="226243"/>
+            <a:ext cx="7566005" cy="584775"/>
+          </a:xfrm>
+          <a:prstGeom prst="rect">
+            <a:avLst/>
+          </a:prstGeom>
+          <a:noFill/>
+        </p:spPr>
+        <p:txBody>
+          <a:bodyPr wrap="square" rtlCol="0">
+            <a:spAutoFit/>
+          </a:bodyPr>
+          <a:lstStyle/>
+          <a:p>
+            <a:pPr lvl="0"/>
+            <a:r>
+              <a:rPr kumimoji="0" lang="es-ES" sz="3200" b="1" i="0" u="none" strike="noStrike" kern="1200" cap="none" spc="0" normalizeH="0" baseline="0" noProof="0" dirty="0">
+                <a:ln>
+                  <a:noFill/>
+                </a:ln>
+                <a:solidFill>
+                  <a:prstClr val="white"/>
+                </a:solidFill>
+                <a:effectLst/>
+                <a:uLnTx/>
+                <a:uFillTx/>
+                <a:latin typeface="Calibri" panose="020F0502020204030204"/>
+                <a:ea typeface="+mn-ea"/>
+                <a:cs typeface="+mn-cs"/>
+              </a:rPr>
+              <a:t>06 — </a:t>
+            </a:r>
+            <a:r>
+              <a:rPr kumimoji="0" lang="es-ES" sz="3200" b="1" i="0" u="none" strike="noStrike" kern="1200" cap="none" spc="0" normalizeH="0" baseline="0" noProof="0" dirty="0" err="1">
+                <a:ln>
+                  <a:noFill/>
+                </a:ln>
+                <a:solidFill>
+                  <a:prstClr val="white"/>
+                </a:solidFill>
+                <a:effectLst/>
+                <a:uLnTx/>
+                <a:uFillTx/>
+                <a:latin typeface="Calibri" panose="020F0502020204030204"/>
+                <a:ea typeface="+mn-ea"/>
+                <a:cs typeface="+mn-cs"/>
+              </a:rPr>
+              <a:t>Conceptions</a:t>
+            </a:r>
+            <a:r>
+              <a:rPr lang="es-ES" sz="3200" b="1" dirty="0">
+                <a:solidFill>
+                  <a:prstClr val="white"/>
+                </a:solidFill>
+              </a:rPr>
+              <a:t> - </a:t>
+            </a:r>
+            <a:r>
+              <a:rPr lang="es-ES" sz="3200" b="1" dirty="0" err="1">
+                <a:solidFill>
+                  <a:prstClr val="white"/>
+                </a:solidFill>
+              </a:rPr>
+              <a:t>diagramme</a:t>
+            </a:r>
+            <a:r>
+              <a:rPr lang="es-ES" sz="3200" b="1" dirty="0">
+                <a:solidFill>
+                  <a:prstClr val="white"/>
+                </a:solidFill>
+              </a:rPr>
+              <a:t> de </a:t>
+            </a:r>
+            <a:r>
+              <a:rPr lang="es-ES" sz="3200" b="1" dirty="0" err="1">
+                <a:solidFill>
+                  <a:prstClr val="white"/>
+                </a:solidFill>
+              </a:rPr>
+              <a:t>classes</a:t>
+            </a:r>
+            <a:endParaRPr kumimoji="0" lang="es-ES" sz="3200" b="1" i="0" u="none" strike="noStrike" kern="1200" cap="none" spc="0" normalizeH="0" baseline="0" noProof="0" dirty="0">
+              <a:ln>
+                <a:noFill/>
+              </a:ln>
+              <a:solidFill>
+                <a:prstClr val="white"/>
+              </a:solidFill>
+              <a:effectLst/>
+              <a:uLnTx/>
+              <a:uFillTx/>
+              <a:latin typeface="Calibri" panose="020F0502020204030204"/>
+              <a:ea typeface="+mn-ea"/>
+              <a:cs typeface="+mn-cs"/>
+            </a:endParaRPr>
+          </a:p>
+        </p:txBody>
+      </p:sp>
+      <p:sp>
+        <p:nvSpPr>
+          <p:cNvPr id="8" name="Shape 14">
+            <a:extLst>
+              <a:ext uri="{FF2B5EF4-FFF2-40B4-BE49-F238E27FC236}">
+                <a16:creationId xmlns:a16="http://schemas.microsoft.com/office/drawing/2014/main" id="{BA08B4A4-C23A-DB20-6EF8-4F790DE0434F}"/>
+              </a:ext>
+            </a:extLst>
+          </p:cNvPr>
+          <p:cNvSpPr/>
+          <p:nvPr/>
+        </p:nvSpPr>
+        <p:spPr>
+          <a:xfrm>
+            <a:off x="11445083" y="6294277"/>
+            <a:ext cx="502920" cy="365760"/>
+          </a:xfrm>
+          <a:prstGeom prst="rect">
+            <a:avLst/>
+          </a:prstGeom>
+          <a:solidFill>
+            <a:srgbClr val="1E3A5F"/>
+          </a:solidFill>
+          <a:ln w="12700">
+            <a:solidFill>
+              <a:srgbClr val="1E3A5F"/>
+            </a:solidFill>
+            <a:prstDash val="solid"/>
+          </a:ln>
+        </p:spPr>
+        <p:txBody>
+          <a:bodyPr/>
+          <a:lstStyle/>
+          <a:p>
+            <a:pPr marL="0" marR="0" lvl="0" indent="0" algn="l" defTabSz="914400" rtl="0" eaLnBrk="1" fontAlgn="auto" latinLnBrk="0" hangingPunct="1">
+              <a:lnSpc>
+                <a:spcPct val="100000"/>
+              </a:lnSpc>
+              <a:spcBef>
+                <a:spcPts val="0"/>
+              </a:spcBef>
+              <a:spcAft>
+                <a:spcPts val="0"/>
+              </a:spcAft>
+              <a:buClrTx/>
+              <a:buSzTx/>
+              <a:buFontTx/>
+              <a:buNone/>
+              <a:tabLst/>
+              <a:defRPr/>
+            </a:pPr>
+            <a:r>
+              <a:rPr kumimoji="0" lang="es-ES" sz="1800" b="1" i="0" u="none" strike="noStrike" kern="1200" cap="none" spc="0" normalizeH="0" baseline="0" noProof="0" dirty="0">
+                <a:ln>
+                  <a:noFill/>
+                </a:ln>
+                <a:solidFill>
+                  <a:prstClr val="white"/>
+                </a:solidFill>
+                <a:effectLst/>
+                <a:uLnTx/>
+                <a:uFillTx/>
+                <a:latin typeface="Calibri" panose="020F0502020204030204"/>
+                <a:ea typeface="+mn-ea"/>
+                <a:cs typeface="+mn-cs"/>
+              </a:rPr>
+              <a:t>  7</a:t>
+            </a:r>
+          </a:p>
+        </p:txBody>
+      </p:sp>
+      <p:pic>
+        <p:nvPicPr>
+          <p:cNvPr id="3" name="Picture 2">
+            <a:extLst>
+              <a:ext uri="{FF2B5EF4-FFF2-40B4-BE49-F238E27FC236}">
+                <a16:creationId xmlns:a16="http://schemas.microsoft.com/office/drawing/2014/main" id="{248E2D66-F0BD-D86E-4240-387122174718}"/>
+              </a:ext>
+            </a:extLst>
+          </p:cNvPr>
+          <p:cNvPicPr>
+            <a:picLocks noChangeAspect="1"/>
+          </p:cNvPicPr>
+          <p:nvPr/>
+        </p:nvPicPr>
+        <p:blipFill>
+          <a:blip r:embed="rId2"/>
+          <a:stretch>
+            <a:fillRect/>
+          </a:stretch>
+        </p:blipFill>
+        <p:spPr>
+          <a:xfrm>
+            <a:off x="2695280" y="1106778"/>
+            <a:ext cx="6801439" cy="5524979"/>
+          </a:xfrm>
+          <a:prstGeom prst="rect">
+            <a:avLst/>
+          </a:prstGeom>
+        </p:spPr>
+      </p:pic>
+    </p:spTree>
+    <p:extLst>
+      <p:ext uri="{BB962C8B-B14F-4D97-AF65-F5344CB8AC3E}">
+        <p14:creationId xmlns:p14="http://schemas.microsoft.com/office/powerpoint/2010/main" val="2022927587"/>
+      </p:ext>
+    </p:extLst>
+  </p:cSld>
+  <p:clrMapOvr>
+    <a:masterClrMapping/>
+  </p:clrMapOvr>
+</p:sld>
+</file>
+
+<file path=ppt/slides/slide14.xml><?xml version="1.0" encoding="utf-8"?>
 <p:sld xmlns:a="http://schemas.openxmlformats.org/drawingml/2006/main" xmlns:r="http://schemas.openxmlformats.org/officeDocument/2006/relationships" xmlns:p="http://schemas.openxmlformats.org/presentationml/2006/main">
   <p:cSld>
     <p:spTree>
@@ -7834,8 +8921,8 @@
         </p:nvSpPr>
         <p:spPr>
           <a:xfrm>
-            <a:off x="365760" y="1097280"/>
-            <a:ext cx="3931920" cy="457200"/>
+            <a:off x="365760" y="1051560"/>
+            <a:ext cx="1188720" cy="365760"/>
           </a:xfrm>
           <a:prstGeom prst="rect">
             <a:avLst/>
@@ -7852,10 +8939,10 @@
             <a:r>
               <a:rPr sz="1800" b="1">
                 <a:solidFill>
-                  <a:srgbClr val="10B981"/>
-                </a:solidFill>
-              </a:rPr>
-              <a:t>✅  Ce qui a été livré</a:t>
+                  <a:srgbClr val="FFFFFF"/>
+                </a:solidFill>
+              </a:rPr>
+              <a:t>Sprint</a:t>
             </a:r>
           </a:p>
         </p:txBody>
@@ -7868,8 +8955,8 @@
         </p:nvSpPr>
         <p:spPr>
           <a:xfrm>
-            <a:off x="365760" y="1645920"/>
-            <a:ext cx="5730240" cy="2693045"/>
+            <a:off x="1600200" y="1051560"/>
+            <a:ext cx="1828800" cy="365760"/>
           </a:xfrm>
           <a:prstGeom prst="rect">
             <a:avLst/>
@@ -7882,327 +8969,15 @@
           </a:bodyPr>
           <a:lstStyle/>
           <a:p>
-            <a:pPr>
-              <a:spcBef>
-                <a:spcPts val="500"/>
-              </a:spcBef>
-            </a:pPr>
-            <a:r>
-              <a:rPr sz="1800" dirty="0">
-                <a:solidFill>
-                  <a:srgbClr val="1E293B"/>
-                </a:solidFill>
-              </a:rPr>
-              <a:t>✓  Plateforme Full</a:t>
-            </a:r>
-            <a:r>
-              <a:rPr lang="es-ES" sz="1800" dirty="0">
-                <a:solidFill>
-                  <a:srgbClr val="1E293B"/>
-                </a:solidFill>
-              </a:rPr>
-              <a:t>-</a:t>
-            </a:r>
-            <a:r>
-              <a:rPr sz="1800" dirty="0">
-                <a:solidFill>
-                  <a:srgbClr val="1E293B"/>
-                </a:solidFill>
-              </a:rPr>
-              <a:t>stack </a:t>
-            </a:r>
-            <a:r>
-              <a:rPr sz="1800" dirty="0" err="1">
-                <a:solidFill>
-                  <a:srgbClr val="1E293B"/>
-                </a:solidFill>
-              </a:rPr>
-              <a:t>fonctionnelle</a:t>
-            </a:r>
-            <a:r>
-              <a:rPr sz="1800" dirty="0">
-                <a:solidFill>
-                  <a:srgbClr val="1E293B"/>
-                </a:solidFill>
-              </a:rPr>
-              <a:t> (React + Node + MySQL)</a:t>
-            </a:r>
-          </a:p>
-          <a:p>
-            <a:pPr>
-              <a:spcBef>
-                <a:spcPts val="500"/>
-              </a:spcBef>
-            </a:pPr>
-            <a:r>
-              <a:rPr sz="1800" dirty="0">
-                <a:solidFill>
-                  <a:srgbClr val="1E293B"/>
-                </a:solidFill>
-              </a:rPr>
-              <a:t>✓  134 points story </a:t>
-            </a:r>
-            <a:r>
-              <a:rPr sz="1800" dirty="0" err="1">
-                <a:solidFill>
-                  <a:srgbClr val="1E293B"/>
-                </a:solidFill>
-              </a:rPr>
-              <a:t>livrés</a:t>
-            </a:r>
-            <a:r>
-              <a:rPr sz="1800" dirty="0">
-                <a:solidFill>
-                  <a:srgbClr val="1E293B"/>
-                </a:solidFill>
-              </a:rPr>
-              <a:t> sur 5 sprints (100%)</a:t>
-            </a:r>
-          </a:p>
-          <a:p>
-            <a:pPr>
-              <a:spcBef>
-                <a:spcPts val="500"/>
-              </a:spcBef>
-            </a:pPr>
-            <a:r>
-              <a:rPr sz="1800" dirty="0">
-                <a:solidFill>
-                  <a:srgbClr val="1E293B"/>
-                </a:solidFill>
-              </a:rPr>
-              <a:t>✓  RBAC complet, JWT </a:t>
-            </a:r>
-            <a:r>
-              <a:rPr sz="1800" dirty="0" err="1">
-                <a:solidFill>
-                  <a:srgbClr val="1E293B"/>
-                </a:solidFill>
-              </a:rPr>
-              <a:t>sécurisé</a:t>
-            </a:r>
-            <a:r>
-              <a:rPr sz="1800" dirty="0">
-                <a:solidFill>
-                  <a:srgbClr val="1E293B"/>
-                </a:solidFill>
-              </a:rPr>
-              <a:t>, </a:t>
-            </a:r>
-            <a:r>
-              <a:rPr sz="1800" dirty="0" err="1">
-                <a:solidFill>
-                  <a:srgbClr val="1E293B"/>
-                </a:solidFill>
-              </a:rPr>
-              <a:t>bcrypt</a:t>
-            </a:r>
-            <a:r>
-              <a:rPr sz="1800" dirty="0">
-                <a:solidFill>
-                  <a:srgbClr val="1E293B"/>
-                </a:solidFill>
-              </a:rPr>
-              <a:t> Round 10</a:t>
-            </a:r>
-          </a:p>
-          <a:p>
-            <a:pPr>
-              <a:spcBef>
-                <a:spcPts val="500"/>
-              </a:spcBef>
-            </a:pPr>
-            <a:r>
-              <a:rPr sz="1800" dirty="0">
-                <a:solidFill>
-                  <a:srgbClr val="1E293B"/>
-                </a:solidFill>
-              </a:rPr>
-              <a:t>✓  Système de commissions </a:t>
-            </a:r>
-            <a:r>
-              <a:rPr sz="1800" dirty="0" err="1">
-                <a:solidFill>
-                  <a:srgbClr val="1E293B"/>
-                </a:solidFill>
-              </a:rPr>
-              <a:t>automatisées</a:t>
-            </a:r>
-            <a:r>
-              <a:rPr sz="1800" dirty="0">
-                <a:solidFill>
-                  <a:srgbClr val="1E293B"/>
-                </a:solidFill>
-              </a:rPr>
-              <a:t> (10% + 5%)</a:t>
-            </a:r>
-          </a:p>
-          <a:p>
-            <a:pPr>
-              <a:spcBef>
-                <a:spcPts val="500"/>
-              </a:spcBef>
-            </a:pPr>
-            <a:r>
-              <a:rPr sz="1800" dirty="0">
-                <a:solidFill>
-                  <a:srgbClr val="1E293B"/>
-                </a:solidFill>
-              </a:rPr>
-              <a:t>✓  5 sponsors </a:t>
-            </a:r>
-            <a:r>
-              <a:rPr sz="1800" dirty="0" err="1">
-                <a:solidFill>
-                  <a:srgbClr val="1E293B"/>
-                </a:solidFill>
-              </a:rPr>
-              <a:t>réels</a:t>
-            </a:r>
-            <a:r>
-              <a:rPr sz="1800" dirty="0">
-                <a:solidFill>
-                  <a:srgbClr val="1E293B"/>
-                </a:solidFill>
-              </a:rPr>
-              <a:t> </a:t>
-            </a:r>
-            <a:r>
-              <a:rPr sz="1800" dirty="0" err="1">
-                <a:solidFill>
-                  <a:srgbClr val="1E293B"/>
-                </a:solidFill>
-              </a:rPr>
-              <a:t>intégrés</a:t>
-            </a:r>
-            <a:r>
-              <a:rPr sz="1800" dirty="0">
-                <a:solidFill>
-                  <a:srgbClr val="1E293B"/>
-                </a:solidFill>
-              </a:rPr>
-              <a:t> avec </a:t>
-            </a:r>
-            <a:r>
-              <a:rPr sz="1800" dirty="0" err="1">
-                <a:solidFill>
-                  <a:srgbClr val="1E293B"/>
-                </a:solidFill>
-              </a:rPr>
-              <a:t>espace</a:t>
-            </a:r>
-            <a:r>
-              <a:rPr sz="1800" dirty="0">
-                <a:solidFill>
-                  <a:srgbClr val="1E293B"/>
-                </a:solidFill>
-              </a:rPr>
-              <a:t> </a:t>
-            </a:r>
-            <a:r>
-              <a:rPr sz="1800" dirty="0" err="1">
-                <a:solidFill>
-                  <a:srgbClr val="1E293B"/>
-                </a:solidFill>
-              </a:rPr>
-              <a:t>dynamique</a:t>
-            </a:r>
-            <a:endParaRPr sz="1800" dirty="0">
-              <a:solidFill>
-                <a:srgbClr val="1E293B"/>
-              </a:solidFill>
-            </a:endParaRPr>
-          </a:p>
-          <a:p>
-            <a:pPr>
-              <a:spcBef>
-                <a:spcPts val="500"/>
-              </a:spcBef>
-            </a:pPr>
-            <a:r>
-              <a:rPr sz="1800" dirty="0">
-                <a:solidFill>
-                  <a:srgbClr val="1E293B"/>
-                </a:solidFill>
-              </a:rPr>
-              <a:t>✓  Documentation Swagger </a:t>
-            </a:r>
-            <a:r>
-              <a:rPr sz="1800" dirty="0" err="1">
-                <a:solidFill>
-                  <a:srgbClr val="1E293B"/>
-                </a:solidFill>
-              </a:rPr>
-              <a:t>complète</a:t>
-            </a:r>
-            <a:r>
-              <a:rPr sz="1800" dirty="0">
-                <a:solidFill>
-                  <a:srgbClr val="1E293B"/>
-                </a:solidFill>
-              </a:rPr>
-              <a:t> sur /</a:t>
-            </a:r>
-            <a:r>
-              <a:rPr sz="1800" dirty="0" err="1">
-                <a:solidFill>
-                  <a:srgbClr val="1E293B"/>
-                </a:solidFill>
-              </a:rPr>
-              <a:t>api</a:t>
-            </a:r>
-            <a:r>
-              <a:rPr sz="1800" dirty="0">
-                <a:solidFill>
-                  <a:srgbClr val="1E293B"/>
-                </a:solidFill>
-              </a:rPr>
-              <a:t>-docs</a:t>
-            </a:r>
-          </a:p>
-          <a:p>
-            <a:pPr>
-              <a:spcBef>
-                <a:spcPts val="500"/>
-              </a:spcBef>
-            </a:pPr>
-            <a:r>
-              <a:rPr sz="1800" dirty="0">
-                <a:solidFill>
-                  <a:srgbClr val="1E293B"/>
-                </a:solidFill>
-              </a:rPr>
-              <a:t>✓  Cron jobs : rappels, </a:t>
-            </a:r>
-            <a:r>
-              <a:rPr sz="1800" dirty="0" err="1">
-                <a:solidFill>
-                  <a:srgbClr val="1E293B"/>
-                </a:solidFill>
-              </a:rPr>
-              <a:t>révocation</a:t>
-            </a:r>
-            <a:r>
-              <a:rPr sz="1800" dirty="0">
-                <a:solidFill>
-                  <a:srgbClr val="1E293B"/>
-                </a:solidFill>
-              </a:rPr>
-              <a:t> Premium, </a:t>
-            </a:r>
-            <a:r>
-              <a:rPr sz="1800" dirty="0" err="1">
-                <a:solidFill>
-                  <a:srgbClr val="1E293B"/>
-                </a:solidFill>
-              </a:rPr>
-              <a:t>archivage</a:t>
-            </a:r>
-            <a:endParaRPr sz="1800" dirty="0">
-              <a:solidFill>
-                <a:srgbClr val="1E293B"/>
-              </a:solidFill>
-            </a:endParaRPr>
+            <a:pPr algn="l"/>
+            <a:r>
+              <a:rPr sz="1800" b="1">
+                <a:solidFill>
+                  <a:srgbClr val="FFFFFF"/>
+                </a:solidFill>
+              </a:rPr>
+              <a:t>Focus</a:t>
+            </a:r>
           </a:p>
         </p:txBody>
       </p:sp>
@@ -8214,8 +8989,8 @@
         </p:nvSpPr>
         <p:spPr>
           <a:xfrm>
-            <a:off x="6537960" y="1188720"/>
-            <a:ext cx="4297680" cy="457200"/>
+            <a:off x="3474720" y="1051560"/>
+            <a:ext cx="914400" cy="365760"/>
           </a:xfrm>
           <a:prstGeom prst="rect">
             <a:avLst/>
@@ -8230,12 +9005,12 @@
           <a:p>
             <a:pPr algn="l"/>
             <a:r>
-              <a:rPr sz="1800" b="1" dirty="0">
-                <a:solidFill>
-                  <a:srgbClr val="1A56DB"/>
-                </a:solidFill>
-              </a:rPr>
-              <a:t>🚀  Perspectives v2.0</a:t>
+              <a:rPr sz="1800" b="1">
+                <a:solidFill>
+                  <a:srgbClr val="FFFFFF"/>
+                </a:solidFill>
+              </a:rPr>
+              <a:t>Points</a:t>
             </a:r>
           </a:p>
         </p:txBody>
@@ -8248,8 +9023,8 @@
         </p:nvSpPr>
         <p:spPr>
           <a:xfrm>
-            <a:off x="6196238" y="1815602"/>
-            <a:ext cx="7604603" cy="2416046"/>
+            <a:off x="4434840" y="1051560"/>
+            <a:ext cx="822960" cy="365760"/>
           </a:xfrm>
           <a:prstGeom prst="rect">
             <a:avLst/>
@@ -8262,118 +9037,935 @@
           </a:bodyPr>
           <a:lstStyle/>
           <a:p>
-            <a:pPr>
-              <a:spcBef>
-                <a:spcPts val="500"/>
-              </a:spcBef>
-            </a:pPr>
-            <a:r>
-              <a:rPr sz="1800">
-                <a:solidFill>
-                  <a:srgbClr val="0EA5E9"/>
-                </a:solidFill>
-              </a:rPr>
-              <a:t>→  Intégration paiement en ligne (Stripe / Bankily API)</a:t>
-            </a:r>
-          </a:p>
-          <a:p>
-            <a:pPr>
-              <a:spcBef>
-                <a:spcPts val="500"/>
-              </a:spcBef>
-            </a:pPr>
-            <a:r>
-              <a:rPr sz="1800">
-                <a:solidFill>
-                  <a:srgbClr val="0EA5E9"/>
-                </a:solidFill>
-              </a:rPr>
-              <a:t>→  Application mobile React Native</a:t>
-            </a:r>
-          </a:p>
-          <a:p>
-            <a:pPr>
-              <a:spcBef>
-                <a:spcPts val="500"/>
-              </a:spcBef>
-            </a:pPr>
-            <a:r>
-              <a:rPr sz="1800">
-                <a:solidFill>
-                  <a:srgbClr val="0EA5E9"/>
-                </a:solidFill>
-              </a:rPr>
-              <a:t>→  Messagerie interne entre membres et responsables</a:t>
-            </a:r>
-          </a:p>
-          <a:p>
-            <a:pPr>
-              <a:spcBef>
-                <a:spcPts val="500"/>
-              </a:spcBef>
-            </a:pPr>
-            <a:r>
-              <a:rPr sz="1800">
-                <a:solidFill>
-                  <a:srgbClr val="0EA5E9"/>
-                </a:solidFill>
-              </a:rPr>
-              <a:t>→  Système de votes et sondages associatifs</a:t>
-            </a:r>
-          </a:p>
-          <a:p>
-            <a:pPr>
-              <a:spcBef>
-                <a:spcPts val="500"/>
-              </a:spcBef>
-            </a:pPr>
-            <a:r>
-              <a:rPr sz="1800">
-                <a:solidFill>
-                  <a:srgbClr val="0EA5E9"/>
-                </a:solidFill>
-              </a:rPr>
-              <a:t>→  Déploiement cloud (VPS / hébergement Mauritanien)</a:t>
-            </a:r>
-          </a:p>
-          <a:p>
-            <a:pPr>
-              <a:spcBef>
-                <a:spcPts val="500"/>
-              </a:spcBef>
-            </a:pPr>
-            <a:r>
-              <a:rPr sz="1800">
-                <a:solidFill>
-                  <a:srgbClr val="0EA5E9"/>
-                </a:solidFill>
-              </a:rPr>
-              <a:t>→  Tableau de bord analytique avancé (graphiques D3.js)</a:t>
-            </a:r>
-          </a:p>
-          <a:p>
-            <a:pPr>
-              <a:spcBef>
-                <a:spcPts val="500"/>
-              </a:spcBef>
-            </a:pPr>
-            <a:r>
-              <a:rPr sz="1800">
-                <a:solidFill>
-                  <a:srgbClr val="0EA5E9"/>
-                </a:solidFill>
-              </a:rPr>
-              <a:t>→  Module candidature aux postes de bureau d'asso</a:t>
-            </a:r>
-          </a:p>
-        </p:txBody>
-      </p:sp>
-      <p:sp>
-        <p:nvSpPr>
-          <p:cNvPr id="10" name="Shape 0">
-            <a:extLst>
-              <a:ext uri="{FF2B5EF4-FFF2-40B4-BE49-F238E27FC236}">
-                <a16:creationId xmlns:a16="http://schemas.microsoft.com/office/drawing/2014/main" id="{930B4CCE-DE34-5941-45A9-215D744F0BC6}"/>
+            <a:pPr algn="l"/>
+            <a:r>
+              <a:rPr sz="1800" b="1">
+                <a:solidFill>
+                  <a:srgbClr val="FFFFFF"/>
+                </a:solidFill>
+              </a:rPr>
+              <a:t>Statut</a:t>
+            </a:r>
+          </a:p>
+        </p:txBody>
+      </p:sp>
+      <p:sp>
+        <p:nvSpPr>
+          <p:cNvPr id="9" name="TextBox 8"/>
+          <p:cNvSpPr txBox="1"/>
+          <p:nvPr/>
+        </p:nvSpPr>
+        <p:spPr>
+          <a:xfrm>
+            <a:off x="5303520" y="1051560"/>
+            <a:ext cx="3474720" cy="365760"/>
+          </a:xfrm>
+          <a:prstGeom prst="rect">
+            <a:avLst/>
+          </a:prstGeom>
+          <a:noFill/>
+        </p:spPr>
+        <p:txBody>
+          <a:bodyPr wrap="square">
+            <a:spAutoFit/>
+          </a:bodyPr>
+          <a:lstStyle/>
+          <a:p>
+            <a:pPr algn="l"/>
+            <a:r>
+              <a:rPr sz="1800" b="1">
+                <a:solidFill>
+                  <a:srgbClr val="FFFFFF"/>
+                </a:solidFill>
+              </a:rPr>
+              <a:t>Livrables principaux</a:t>
+            </a:r>
+          </a:p>
+        </p:txBody>
+      </p:sp>
+      <p:sp>
+        <p:nvSpPr>
+          <p:cNvPr id="10" name="TextBox 9"/>
+          <p:cNvSpPr txBox="1"/>
+          <p:nvPr/>
+        </p:nvSpPr>
+        <p:spPr>
+          <a:xfrm>
+            <a:off x="365760" y="1554480"/>
+            <a:ext cx="1188720" cy="457200"/>
+          </a:xfrm>
+          <a:prstGeom prst="rect">
+            <a:avLst/>
+          </a:prstGeom>
+          <a:noFill/>
+        </p:spPr>
+        <p:txBody>
+          <a:bodyPr wrap="square">
+            <a:spAutoFit/>
+          </a:bodyPr>
+          <a:lstStyle/>
+          <a:p>
+            <a:pPr algn="l"/>
+            <a:r>
+              <a:rPr sz="1800" b="1">
+                <a:solidFill>
+                  <a:srgbClr val="1A56DB"/>
+                </a:solidFill>
+              </a:rPr>
+              <a:t>Sprint 0</a:t>
+            </a:r>
+          </a:p>
+        </p:txBody>
+      </p:sp>
+      <p:sp>
+        <p:nvSpPr>
+          <p:cNvPr id="11" name="TextBox 10"/>
+          <p:cNvSpPr txBox="1"/>
+          <p:nvPr/>
+        </p:nvSpPr>
+        <p:spPr>
+          <a:xfrm>
+            <a:off x="1600200" y="1554480"/>
+            <a:ext cx="1828800" cy="457200"/>
+          </a:xfrm>
+          <a:prstGeom prst="rect">
+            <a:avLst/>
+          </a:prstGeom>
+          <a:noFill/>
+        </p:spPr>
+        <p:txBody>
+          <a:bodyPr wrap="square">
+            <a:spAutoFit/>
+          </a:bodyPr>
+          <a:lstStyle/>
+          <a:p>
+            <a:pPr algn="l"/>
+            <a:r>
+              <a:rPr sz="1800" b="0">
+                <a:solidFill>
+                  <a:srgbClr val="1E293B"/>
+                </a:solidFill>
+              </a:rPr>
+              <a:t>Initialisation</a:t>
+            </a:r>
+          </a:p>
+        </p:txBody>
+      </p:sp>
+      <p:sp>
+        <p:nvSpPr>
+          <p:cNvPr id="12" name="TextBox 11"/>
+          <p:cNvSpPr txBox="1"/>
+          <p:nvPr/>
+        </p:nvSpPr>
+        <p:spPr>
+          <a:xfrm>
+            <a:off x="3474720" y="1554480"/>
+            <a:ext cx="914400" cy="457200"/>
+          </a:xfrm>
+          <a:prstGeom prst="rect">
+            <a:avLst/>
+          </a:prstGeom>
+          <a:noFill/>
+        </p:spPr>
+        <p:txBody>
+          <a:bodyPr wrap="square">
+            <a:spAutoFit/>
+          </a:bodyPr>
+          <a:lstStyle/>
+          <a:p>
+            <a:pPr algn="l"/>
+            <a:r>
+              <a:rPr sz="1800" b="1">
+                <a:solidFill>
+                  <a:srgbClr val="10B981"/>
+                </a:solidFill>
+              </a:rPr>
+              <a:t>22 pts</a:t>
+            </a:r>
+          </a:p>
+        </p:txBody>
+      </p:sp>
+      <p:sp>
+        <p:nvSpPr>
+          <p:cNvPr id="13" name="TextBox 12"/>
+          <p:cNvSpPr txBox="1"/>
+          <p:nvPr/>
+        </p:nvSpPr>
+        <p:spPr>
+          <a:xfrm>
+            <a:off x="4434840" y="1554480"/>
+            <a:ext cx="822960" cy="457200"/>
+          </a:xfrm>
+          <a:prstGeom prst="rect">
+            <a:avLst/>
+          </a:prstGeom>
+          <a:noFill/>
+        </p:spPr>
+        <p:txBody>
+          <a:bodyPr wrap="square">
+            <a:spAutoFit/>
+          </a:bodyPr>
+          <a:lstStyle/>
+          <a:p>
+            <a:pPr algn="ctr"/>
+            <a:r>
+              <a:rPr sz="1800" b="0"/>
+              <a:t>✅</a:t>
+            </a:r>
+          </a:p>
+        </p:txBody>
+      </p:sp>
+      <p:sp>
+        <p:nvSpPr>
+          <p:cNvPr id="14" name="TextBox 13"/>
+          <p:cNvSpPr txBox="1"/>
+          <p:nvPr/>
+        </p:nvSpPr>
+        <p:spPr>
+          <a:xfrm>
+            <a:off x="5303520" y="1554480"/>
+            <a:ext cx="3474720" cy="502920"/>
+          </a:xfrm>
+          <a:prstGeom prst="rect">
+            <a:avLst/>
+          </a:prstGeom>
+          <a:noFill/>
+        </p:spPr>
+        <p:txBody>
+          <a:bodyPr wrap="square">
+            <a:spAutoFit/>
+          </a:bodyPr>
+          <a:lstStyle/>
+          <a:p>
+            <a:pPr algn="l"/>
+            <a:r>
+              <a:rPr sz="1800" b="0">
+                <a:solidFill>
+                  <a:srgbClr val="64748B"/>
+                </a:solidFill>
+              </a:rPr>
+              <a:t>Vision produit, backlog, DoD, environnement Git, architecture MVC validée</a:t>
+            </a:r>
+          </a:p>
+        </p:txBody>
+      </p:sp>
+      <p:sp>
+        <p:nvSpPr>
+          <p:cNvPr id="15" name="TextBox 14"/>
+          <p:cNvSpPr txBox="1"/>
+          <p:nvPr/>
+        </p:nvSpPr>
+        <p:spPr>
+          <a:xfrm>
+            <a:off x="365760" y="2395728"/>
+            <a:ext cx="1188720" cy="457200"/>
+          </a:xfrm>
+          <a:prstGeom prst="rect">
+            <a:avLst/>
+          </a:prstGeom>
+          <a:noFill/>
+        </p:spPr>
+        <p:txBody>
+          <a:bodyPr wrap="square">
+            <a:spAutoFit/>
+          </a:bodyPr>
+          <a:lstStyle/>
+          <a:p>
+            <a:pPr algn="l"/>
+            <a:r>
+              <a:rPr sz="1800" b="1">
+                <a:solidFill>
+                  <a:srgbClr val="1A56DB"/>
+                </a:solidFill>
+              </a:rPr>
+              <a:t>Sprint 1</a:t>
+            </a:r>
+          </a:p>
+        </p:txBody>
+      </p:sp>
+      <p:sp>
+        <p:nvSpPr>
+          <p:cNvPr id="16" name="TextBox 15"/>
+          <p:cNvSpPr txBox="1"/>
+          <p:nvPr/>
+        </p:nvSpPr>
+        <p:spPr>
+          <a:xfrm>
+            <a:off x="1600200" y="2395728"/>
+            <a:ext cx="1828800" cy="457200"/>
+          </a:xfrm>
+          <a:prstGeom prst="rect">
+            <a:avLst/>
+          </a:prstGeom>
+          <a:noFill/>
+        </p:spPr>
+        <p:txBody>
+          <a:bodyPr wrap="square">
+            <a:spAutoFit/>
+          </a:bodyPr>
+          <a:lstStyle/>
+          <a:p>
+            <a:pPr algn="l"/>
+            <a:r>
+              <a:rPr sz="1800" b="0">
+                <a:solidFill>
+                  <a:srgbClr val="1E293B"/>
+                </a:solidFill>
+              </a:rPr>
+              <a:t>Auth &amp; Associations</a:t>
+            </a:r>
+          </a:p>
+        </p:txBody>
+      </p:sp>
+      <p:sp>
+        <p:nvSpPr>
+          <p:cNvPr id="17" name="TextBox 16"/>
+          <p:cNvSpPr txBox="1"/>
+          <p:nvPr/>
+        </p:nvSpPr>
+        <p:spPr>
+          <a:xfrm>
+            <a:off x="3474720" y="2395728"/>
+            <a:ext cx="914400" cy="457200"/>
+          </a:xfrm>
+          <a:prstGeom prst="rect">
+            <a:avLst/>
+          </a:prstGeom>
+          <a:noFill/>
+        </p:spPr>
+        <p:txBody>
+          <a:bodyPr wrap="square">
+            <a:spAutoFit/>
+          </a:bodyPr>
+          <a:lstStyle/>
+          <a:p>
+            <a:pPr algn="l"/>
+            <a:r>
+              <a:rPr sz="1800" b="1">
+                <a:solidFill>
+                  <a:srgbClr val="10B981"/>
+                </a:solidFill>
+              </a:rPr>
+              <a:t>23 pts</a:t>
+            </a:r>
+          </a:p>
+        </p:txBody>
+      </p:sp>
+      <p:sp>
+        <p:nvSpPr>
+          <p:cNvPr id="18" name="TextBox 17"/>
+          <p:cNvSpPr txBox="1"/>
+          <p:nvPr/>
+        </p:nvSpPr>
+        <p:spPr>
+          <a:xfrm>
+            <a:off x="4434840" y="2395728"/>
+            <a:ext cx="822960" cy="457200"/>
+          </a:xfrm>
+          <a:prstGeom prst="rect">
+            <a:avLst/>
+          </a:prstGeom>
+          <a:noFill/>
+        </p:spPr>
+        <p:txBody>
+          <a:bodyPr wrap="square">
+            <a:spAutoFit/>
+          </a:bodyPr>
+          <a:lstStyle/>
+          <a:p>
+            <a:pPr algn="ctr"/>
+            <a:r>
+              <a:rPr sz="1800" b="0"/>
+              <a:t>✅</a:t>
+            </a:r>
+          </a:p>
+        </p:txBody>
+      </p:sp>
+      <p:sp>
+        <p:nvSpPr>
+          <p:cNvPr id="19" name="TextBox 18"/>
+          <p:cNvSpPr txBox="1"/>
+          <p:nvPr/>
+        </p:nvSpPr>
+        <p:spPr>
+          <a:xfrm>
+            <a:off x="5303520" y="2395728"/>
+            <a:ext cx="3474720" cy="502920"/>
+          </a:xfrm>
+          <a:prstGeom prst="rect">
+            <a:avLst/>
+          </a:prstGeom>
+          <a:noFill/>
+        </p:spPr>
+        <p:txBody>
+          <a:bodyPr wrap="square">
+            <a:spAutoFit/>
+          </a:bodyPr>
+          <a:lstStyle/>
+          <a:p>
+            <a:pPr algn="l"/>
+            <a:r>
+              <a:rPr sz="1800" b="0">
+                <a:solidFill>
+                  <a:srgbClr val="64748B"/>
+                </a:solidFill>
+              </a:rPr>
+              <a:t>Inscription, JWT, email confirm, rôles, annuaire associations</a:t>
+            </a:r>
+          </a:p>
+        </p:txBody>
+      </p:sp>
+      <p:sp>
+        <p:nvSpPr>
+          <p:cNvPr id="20" name="TextBox 19"/>
+          <p:cNvSpPr txBox="1"/>
+          <p:nvPr/>
+        </p:nvSpPr>
+        <p:spPr>
+          <a:xfrm>
+            <a:off x="365760" y="3236976"/>
+            <a:ext cx="1188720" cy="457200"/>
+          </a:xfrm>
+          <a:prstGeom prst="rect">
+            <a:avLst/>
+          </a:prstGeom>
+          <a:noFill/>
+        </p:spPr>
+        <p:txBody>
+          <a:bodyPr wrap="square">
+            <a:spAutoFit/>
+          </a:bodyPr>
+          <a:lstStyle/>
+          <a:p>
+            <a:pPr algn="l"/>
+            <a:r>
+              <a:rPr sz="1800" b="1">
+                <a:solidFill>
+                  <a:srgbClr val="1A56DB"/>
+                </a:solidFill>
+              </a:rPr>
+              <a:t>Sprint 2</a:t>
+            </a:r>
+          </a:p>
+        </p:txBody>
+      </p:sp>
+      <p:sp>
+        <p:nvSpPr>
+          <p:cNvPr id="21" name="TextBox 20"/>
+          <p:cNvSpPr txBox="1"/>
+          <p:nvPr/>
+        </p:nvSpPr>
+        <p:spPr>
+          <a:xfrm>
+            <a:off x="1600200" y="3236976"/>
+            <a:ext cx="1828800" cy="457200"/>
+          </a:xfrm>
+          <a:prstGeom prst="rect">
+            <a:avLst/>
+          </a:prstGeom>
+          <a:noFill/>
+        </p:spPr>
+        <p:txBody>
+          <a:bodyPr wrap="square">
+            <a:spAutoFit/>
+          </a:bodyPr>
+          <a:lstStyle/>
+          <a:p>
+            <a:pPr algn="l"/>
+            <a:r>
+              <a:rPr sz="1800" b="0">
+                <a:solidFill>
+                  <a:srgbClr val="1E293B"/>
+                </a:solidFill>
+              </a:rPr>
+              <a:t>Adhésions &amp; Événements</a:t>
+            </a:r>
+          </a:p>
+        </p:txBody>
+      </p:sp>
+      <p:sp>
+        <p:nvSpPr>
+          <p:cNvPr id="22" name="TextBox 21"/>
+          <p:cNvSpPr txBox="1"/>
+          <p:nvPr/>
+        </p:nvSpPr>
+        <p:spPr>
+          <a:xfrm>
+            <a:off x="3474720" y="3236976"/>
+            <a:ext cx="914400" cy="457200"/>
+          </a:xfrm>
+          <a:prstGeom prst="rect">
+            <a:avLst/>
+          </a:prstGeom>
+          <a:noFill/>
+        </p:spPr>
+        <p:txBody>
+          <a:bodyPr wrap="square">
+            <a:spAutoFit/>
+          </a:bodyPr>
+          <a:lstStyle/>
+          <a:p>
+            <a:pPr algn="l"/>
+            <a:r>
+              <a:rPr sz="1800" b="1">
+                <a:solidFill>
+                  <a:srgbClr val="10B981"/>
+                </a:solidFill>
+              </a:rPr>
+              <a:t>31 pts</a:t>
+            </a:r>
+          </a:p>
+        </p:txBody>
+      </p:sp>
+      <p:sp>
+        <p:nvSpPr>
+          <p:cNvPr id="23" name="TextBox 22"/>
+          <p:cNvSpPr txBox="1"/>
+          <p:nvPr/>
+        </p:nvSpPr>
+        <p:spPr>
+          <a:xfrm>
+            <a:off x="4434840" y="3236976"/>
+            <a:ext cx="822960" cy="457200"/>
+          </a:xfrm>
+          <a:prstGeom prst="rect">
+            <a:avLst/>
+          </a:prstGeom>
+          <a:noFill/>
+        </p:spPr>
+        <p:txBody>
+          <a:bodyPr wrap="square">
+            <a:spAutoFit/>
+          </a:bodyPr>
+          <a:lstStyle/>
+          <a:p>
+            <a:pPr algn="ctr"/>
+            <a:r>
+              <a:rPr sz="1800" b="0"/>
+              <a:t>✅</a:t>
+            </a:r>
+          </a:p>
+        </p:txBody>
+      </p:sp>
+      <p:sp>
+        <p:nvSpPr>
+          <p:cNvPr id="24" name="TextBox 23"/>
+          <p:cNvSpPr txBox="1"/>
+          <p:nvPr/>
+        </p:nvSpPr>
+        <p:spPr>
+          <a:xfrm>
+            <a:off x="5303520" y="3236976"/>
+            <a:ext cx="3474720" cy="502920"/>
+          </a:xfrm>
+          <a:prstGeom prst="rect">
+            <a:avLst/>
+          </a:prstGeom>
+          <a:noFill/>
+        </p:spPr>
+        <p:txBody>
+          <a:bodyPr wrap="square">
+            <a:spAutoFit/>
+          </a:bodyPr>
+          <a:lstStyle/>
+          <a:p>
+            <a:pPr algn="l"/>
+            <a:r>
+              <a:rPr sz="1800" b="0">
+                <a:solidFill>
+                  <a:srgbClr val="64748B"/>
+                </a:solidFill>
+              </a:rPr>
+              <a:t>Anti-conflit salle, inscriptions, tarification, liste nominative</a:t>
+            </a:r>
+          </a:p>
+        </p:txBody>
+      </p:sp>
+      <p:sp>
+        <p:nvSpPr>
+          <p:cNvPr id="25" name="TextBox 24"/>
+          <p:cNvSpPr txBox="1"/>
+          <p:nvPr/>
+        </p:nvSpPr>
+        <p:spPr>
+          <a:xfrm>
+            <a:off x="365760" y="4078224"/>
+            <a:ext cx="1188720" cy="457200"/>
+          </a:xfrm>
+          <a:prstGeom prst="rect">
+            <a:avLst/>
+          </a:prstGeom>
+          <a:noFill/>
+        </p:spPr>
+        <p:txBody>
+          <a:bodyPr wrap="square">
+            <a:spAutoFit/>
+          </a:bodyPr>
+          <a:lstStyle/>
+          <a:p>
+            <a:pPr algn="l"/>
+            <a:r>
+              <a:rPr sz="1800" b="1">
+                <a:solidFill>
+                  <a:srgbClr val="1A56DB"/>
+                </a:solidFill>
+              </a:rPr>
+              <a:t>Sprint 3</a:t>
+            </a:r>
+          </a:p>
+        </p:txBody>
+      </p:sp>
+      <p:sp>
+        <p:nvSpPr>
+          <p:cNvPr id="26" name="TextBox 25"/>
+          <p:cNvSpPr txBox="1"/>
+          <p:nvPr/>
+        </p:nvSpPr>
+        <p:spPr>
+          <a:xfrm>
+            <a:off x="1600200" y="4078224"/>
+            <a:ext cx="1828800" cy="457200"/>
+          </a:xfrm>
+          <a:prstGeom prst="rect">
+            <a:avLst/>
+          </a:prstGeom>
+          <a:noFill/>
+        </p:spPr>
+        <p:txBody>
+          <a:bodyPr wrap="square">
+            <a:spAutoFit/>
+          </a:bodyPr>
+          <a:lstStyle/>
+          <a:p>
+            <a:pPr algn="l"/>
+            <a:r>
+              <a:rPr sz="1800" b="0">
+                <a:solidFill>
+                  <a:srgbClr val="1E293B"/>
+                </a:solidFill>
+              </a:rPr>
+              <a:t>Notifs &amp; Dashboards</a:t>
+            </a:r>
+          </a:p>
+        </p:txBody>
+      </p:sp>
+      <p:sp>
+        <p:nvSpPr>
+          <p:cNvPr id="27" name="TextBox 26"/>
+          <p:cNvSpPr txBox="1"/>
+          <p:nvPr/>
+        </p:nvSpPr>
+        <p:spPr>
+          <a:xfrm>
+            <a:off x="3474720" y="4078224"/>
+            <a:ext cx="914400" cy="457200"/>
+          </a:xfrm>
+          <a:prstGeom prst="rect">
+            <a:avLst/>
+          </a:prstGeom>
+          <a:noFill/>
+        </p:spPr>
+        <p:txBody>
+          <a:bodyPr wrap="square">
+            <a:spAutoFit/>
+          </a:bodyPr>
+          <a:lstStyle/>
+          <a:p>
+            <a:pPr algn="l"/>
+            <a:r>
+              <a:rPr sz="1800" b="1">
+                <a:solidFill>
+                  <a:srgbClr val="10B981"/>
+                </a:solidFill>
+              </a:rPr>
+              <a:t>29 pts</a:t>
+            </a:r>
+          </a:p>
+        </p:txBody>
+      </p:sp>
+      <p:sp>
+        <p:nvSpPr>
+          <p:cNvPr id="28" name="TextBox 27"/>
+          <p:cNvSpPr txBox="1"/>
+          <p:nvPr/>
+        </p:nvSpPr>
+        <p:spPr>
+          <a:xfrm>
+            <a:off x="4434840" y="4078224"/>
+            <a:ext cx="822960" cy="457200"/>
+          </a:xfrm>
+          <a:prstGeom prst="rect">
+            <a:avLst/>
+          </a:prstGeom>
+          <a:noFill/>
+        </p:spPr>
+        <p:txBody>
+          <a:bodyPr wrap="square">
+            <a:spAutoFit/>
+          </a:bodyPr>
+          <a:lstStyle/>
+          <a:p>
+            <a:pPr algn="ctr"/>
+            <a:r>
+              <a:rPr sz="1800" b="0"/>
+              <a:t>✅</a:t>
+            </a:r>
+          </a:p>
+        </p:txBody>
+      </p:sp>
+      <p:sp>
+        <p:nvSpPr>
+          <p:cNvPr id="29" name="TextBox 28"/>
+          <p:cNvSpPr txBox="1"/>
+          <p:nvPr/>
+        </p:nvSpPr>
+        <p:spPr>
+          <a:xfrm>
+            <a:off x="5303520" y="4078224"/>
+            <a:ext cx="3474720" cy="502920"/>
+          </a:xfrm>
+          <a:prstGeom prst="rect">
+            <a:avLst/>
+          </a:prstGeom>
+          <a:noFill/>
+        </p:spPr>
+        <p:txBody>
+          <a:bodyPr wrap="square">
+            <a:spAutoFit/>
+          </a:bodyPr>
+          <a:lstStyle/>
+          <a:p>
+            <a:pPr algn="l"/>
+            <a:r>
+              <a:rPr sz="1800" b="0">
+                <a:solidFill>
+                  <a:srgbClr val="64748B"/>
+                </a:solidFill>
+              </a:rPr>
+              <a:t>Emails auto, cron rappels, trésorerie, historique participant</a:t>
+            </a:r>
+          </a:p>
+        </p:txBody>
+      </p:sp>
+      <p:sp>
+        <p:nvSpPr>
+          <p:cNvPr id="30" name="TextBox 29"/>
+          <p:cNvSpPr txBox="1"/>
+          <p:nvPr/>
+        </p:nvSpPr>
+        <p:spPr>
+          <a:xfrm>
+            <a:off x="365760" y="4919472"/>
+            <a:ext cx="1188720" cy="457200"/>
+          </a:xfrm>
+          <a:prstGeom prst="rect">
+            <a:avLst/>
+          </a:prstGeom>
+          <a:noFill/>
+        </p:spPr>
+        <p:txBody>
+          <a:bodyPr wrap="square">
+            <a:spAutoFit/>
+          </a:bodyPr>
+          <a:lstStyle/>
+          <a:p>
+            <a:pPr algn="l"/>
+            <a:r>
+              <a:rPr sz="1800" b="1">
+                <a:solidFill>
+                  <a:srgbClr val="1A56DB"/>
+                </a:solidFill>
+              </a:rPr>
+              <a:t>Sprint 4</a:t>
+            </a:r>
+          </a:p>
+        </p:txBody>
+      </p:sp>
+      <p:sp>
+        <p:nvSpPr>
+          <p:cNvPr id="31" name="TextBox 30"/>
+          <p:cNvSpPr txBox="1"/>
+          <p:nvPr/>
+        </p:nvSpPr>
+        <p:spPr>
+          <a:xfrm>
+            <a:off x="1600200" y="4919472"/>
+            <a:ext cx="1828800" cy="457200"/>
+          </a:xfrm>
+          <a:prstGeom prst="rect">
+            <a:avLst/>
+          </a:prstGeom>
+          <a:noFill/>
+        </p:spPr>
+        <p:txBody>
+          <a:bodyPr wrap="square">
+            <a:spAutoFit/>
+          </a:bodyPr>
+          <a:lstStyle/>
+          <a:p>
+            <a:pPr algn="l"/>
+            <a:r>
+              <a:rPr sz="1800" b="0">
+                <a:solidFill>
+                  <a:srgbClr val="1E293B"/>
+                </a:solidFill>
+              </a:rPr>
+              <a:t>Freemium &amp; Livraison</a:t>
+            </a:r>
+          </a:p>
+        </p:txBody>
+      </p:sp>
+      <p:sp>
+        <p:nvSpPr>
+          <p:cNvPr id="32" name="TextBox 31"/>
+          <p:cNvSpPr txBox="1"/>
+          <p:nvPr/>
+        </p:nvSpPr>
+        <p:spPr>
+          <a:xfrm>
+            <a:off x="3474720" y="4919472"/>
+            <a:ext cx="914400" cy="457200"/>
+          </a:xfrm>
+          <a:prstGeom prst="rect">
+            <a:avLst/>
+          </a:prstGeom>
+          <a:noFill/>
+        </p:spPr>
+        <p:txBody>
+          <a:bodyPr wrap="square">
+            <a:spAutoFit/>
+          </a:bodyPr>
+          <a:lstStyle/>
+          <a:p>
+            <a:pPr algn="l"/>
+            <a:r>
+              <a:rPr sz="1800" b="1">
+                <a:solidFill>
+                  <a:srgbClr val="10B981"/>
+                </a:solidFill>
+              </a:rPr>
+              <a:t>29 pts</a:t>
+            </a:r>
+          </a:p>
+        </p:txBody>
+      </p:sp>
+      <p:sp>
+        <p:nvSpPr>
+          <p:cNvPr id="33" name="TextBox 32"/>
+          <p:cNvSpPr txBox="1"/>
+          <p:nvPr/>
+        </p:nvSpPr>
+        <p:spPr>
+          <a:xfrm>
+            <a:off x="4434840" y="4919472"/>
+            <a:ext cx="822960" cy="457200"/>
+          </a:xfrm>
+          <a:prstGeom prst="rect">
+            <a:avLst/>
+          </a:prstGeom>
+          <a:noFill/>
+        </p:spPr>
+        <p:txBody>
+          <a:bodyPr wrap="square">
+            <a:spAutoFit/>
+          </a:bodyPr>
+          <a:lstStyle/>
+          <a:p>
+            <a:pPr algn="ctr"/>
+            <a:r>
+              <a:rPr sz="1800" b="0"/>
+              <a:t>✅</a:t>
+            </a:r>
+          </a:p>
+        </p:txBody>
+      </p:sp>
+      <p:sp>
+        <p:nvSpPr>
+          <p:cNvPr id="34" name="TextBox 33"/>
+          <p:cNvSpPr txBox="1"/>
+          <p:nvPr/>
+        </p:nvSpPr>
+        <p:spPr>
+          <a:xfrm>
+            <a:off x="5303520" y="4919472"/>
+            <a:ext cx="3474720" cy="502920"/>
+          </a:xfrm>
+          <a:prstGeom prst="rect">
+            <a:avLst/>
+          </a:prstGeom>
+          <a:noFill/>
+        </p:spPr>
+        <p:txBody>
+          <a:bodyPr wrap="square">
+            <a:spAutoFit/>
+          </a:bodyPr>
+          <a:lstStyle/>
+          <a:p>
+            <a:pPr algn="l"/>
+            <a:r>
+              <a:rPr sz="1800" b="0">
+                <a:solidFill>
+                  <a:srgbClr val="64748B"/>
+                </a:solidFill>
+              </a:rPr>
+              <a:t>RBAC complet, commissions, sponsors, Swagger, corrections</a:t>
+            </a:r>
+          </a:p>
+        </p:txBody>
+      </p:sp>
+      <p:sp>
+        <p:nvSpPr>
+          <p:cNvPr id="35" name="TextBox 34"/>
+          <p:cNvSpPr txBox="1"/>
+          <p:nvPr/>
+        </p:nvSpPr>
+        <p:spPr>
+          <a:xfrm>
+            <a:off x="365760" y="5920504"/>
+            <a:ext cx="8229600" cy="411480"/>
+          </a:xfrm>
+          <a:prstGeom prst="rect">
+            <a:avLst/>
+          </a:prstGeom>
+          <a:noFill/>
+        </p:spPr>
+        <p:txBody>
+          <a:bodyPr wrap="square">
+            <a:spAutoFit/>
+          </a:bodyPr>
+          <a:lstStyle/>
+          <a:p>
+            <a:pPr algn="ctr"/>
+            <a:r>
+              <a:rPr sz="1800" b="1" dirty="0">
+                <a:solidFill>
+                  <a:srgbClr val="1A56DB"/>
+                </a:solidFill>
+              </a:rPr>
+              <a:t>Total : 134 points story  |  5 sprints  |  100% </a:t>
+            </a:r>
+            <a:r>
+              <a:rPr sz="1800" b="1" dirty="0" err="1">
+                <a:solidFill>
+                  <a:srgbClr val="1A56DB"/>
+                </a:solidFill>
+              </a:rPr>
+              <a:t>complété</a:t>
+            </a:r>
+            <a:endParaRPr sz="1800" b="1" dirty="0">
+              <a:solidFill>
+                <a:srgbClr val="1A56DB"/>
+              </a:solidFill>
+            </a:endParaRPr>
+          </a:p>
+        </p:txBody>
+      </p:sp>
+      <p:sp>
+        <p:nvSpPr>
+          <p:cNvPr id="36" name="Shape 14">
+            <a:extLst>
+              <a:ext uri="{FF2B5EF4-FFF2-40B4-BE49-F238E27FC236}">
+                <a16:creationId xmlns:a16="http://schemas.microsoft.com/office/drawing/2014/main" id="{B711363B-AFD9-A70D-257F-779212996399}"/>
               </a:ext>
             </a:extLst>
           </p:cNvPr>
@@ -8382,8 +9974,8 @@
         </p:nvSpPr>
         <p:spPr>
           <a:xfrm>
-            <a:off x="0" y="0"/>
-            <a:ext cx="12192000" cy="1005840"/>
+            <a:off x="11482791" y="6331984"/>
+            <a:ext cx="502920" cy="365760"/>
           </a:xfrm>
           <a:prstGeom prst="rect">
             <a:avLst/>
@@ -8402,59 +9994,23 @@
           <a:bodyPr/>
           <a:lstStyle/>
           <a:p>
-            <a:endParaRPr lang="es-ES" dirty="0">
-              <a:solidFill>
-                <a:schemeClr val="bg1"/>
-              </a:solidFill>
-            </a:endParaRPr>
-          </a:p>
-        </p:txBody>
-      </p:sp>
-      <p:sp>
-        <p:nvSpPr>
-          <p:cNvPr id="11" name="TextBox 10">
-            <a:extLst>
-              <a:ext uri="{FF2B5EF4-FFF2-40B4-BE49-F238E27FC236}">
-                <a16:creationId xmlns:a16="http://schemas.microsoft.com/office/drawing/2014/main" id="{BE4A3C25-9BA5-876D-8D06-D315D087D74D}"/>
-              </a:ext>
-            </a:extLst>
-          </p:cNvPr>
-          <p:cNvSpPr txBox="1"/>
-          <p:nvPr/>
-        </p:nvSpPr>
-        <p:spPr>
-          <a:xfrm>
-            <a:off x="179109" y="131975"/>
-            <a:ext cx="7692272" cy="584775"/>
-          </a:xfrm>
-          <a:prstGeom prst="rect">
-            <a:avLst/>
-          </a:prstGeom>
-          <a:noFill/>
-        </p:spPr>
-        <p:txBody>
-          <a:bodyPr wrap="square" rtlCol="0">
-            <a:spAutoFit/>
-          </a:bodyPr>
-          <a:lstStyle/>
-          <a:p>
-            <a:r>
-              <a:rPr lang="es-ES" sz="3200" b="1" dirty="0">
+            <a:r>
+              <a:rPr lang="es-ES" sz="1800" b="1" dirty="0">
                 <a:solidFill>
                   <a:schemeClr val="bg1"/>
                 </a:solidFill>
               </a:rPr>
-              <a:t>09 — Bilan &amp; Perspectives</a:t>
-            </a:r>
-          </a:p>
-        </p:txBody>
-      </p:sp>
-      <p:sp>
-        <p:nvSpPr>
-          <p:cNvPr id="12" name="Shape 14">
-            <a:extLst>
-              <a:ext uri="{FF2B5EF4-FFF2-40B4-BE49-F238E27FC236}">
-                <a16:creationId xmlns:a16="http://schemas.microsoft.com/office/drawing/2014/main" id="{C67E80A2-9D93-18C3-B5CB-D685D2D23411}"/>
+              <a:t>  8</a:t>
+            </a:r>
+          </a:p>
+        </p:txBody>
+      </p:sp>
+      <p:sp>
+        <p:nvSpPr>
+          <p:cNvPr id="37" name="Shape 0">
+            <a:extLst>
+              <a:ext uri="{FF2B5EF4-FFF2-40B4-BE49-F238E27FC236}">
+                <a16:creationId xmlns:a16="http://schemas.microsoft.com/office/drawing/2014/main" id="{BB6BFB96-E48B-FF92-6C42-D06257294500}"/>
               </a:ext>
             </a:extLst>
           </p:cNvPr>
@@ -8463,8 +10019,8 @@
         </p:nvSpPr>
         <p:spPr>
           <a:xfrm>
-            <a:off x="11340445" y="6331984"/>
-            <a:ext cx="645266" cy="365760"/>
+            <a:off x="0" y="0"/>
+            <a:ext cx="12192000" cy="1005840"/>
           </a:xfrm>
           <a:prstGeom prst="rect">
             <a:avLst/>
@@ -8483,13 +10039,49 @@
           <a:bodyPr/>
           <a:lstStyle/>
           <a:p>
-            <a:r>
-              <a:rPr lang="es-ES" sz="1800" b="1" dirty="0">
+            <a:endParaRPr lang="es-ES" dirty="0">
+              <a:solidFill>
+                <a:schemeClr val="bg1"/>
+              </a:solidFill>
+            </a:endParaRPr>
+          </a:p>
+        </p:txBody>
+      </p:sp>
+      <p:sp>
+        <p:nvSpPr>
+          <p:cNvPr id="38" name="TextBox 37">
+            <a:extLst>
+              <a:ext uri="{FF2B5EF4-FFF2-40B4-BE49-F238E27FC236}">
+                <a16:creationId xmlns:a16="http://schemas.microsoft.com/office/drawing/2014/main" id="{BEA831FC-836F-5DF6-9758-17A9B6A343E8}"/>
+              </a:ext>
+            </a:extLst>
+          </p:cNvPr>
+          <p:cNvSpPr txBox="1"/>
+          <p:nvPr/>
+        </p:nvSpPr>
+        <p:spPr>
+          <a:xfrm>
+            <a:off x="365760" y="226243"/>
+            <a:ext cx="8806520" cy="584775"/>
+          </a:xfrm>
+          <a:prstGeom prst="rect">
+            <a:avLst/>
+          </a:prstGeom>
+          <a:noFill/>
+        </p:spPr>
+        <p:txBody>
+          <a:bodyPr wrap="square" rtlCol="0">
+            <a:spAutoFit/>
+          </a:bodyPr>
+          <a:lstStyle/>
+          <a:p>
+            <a:r>
+              <a:rPr lang="es-ES" sz="3200" b="1" dirty="0">
                 <a:solidFill>
                   <a:schemeClr val="bg1"/>
                 </a:solidFill>
               </a:rPr>
-              <a:t>  10</a:t>
+              <a:t>07 — Méthodologie Scrum &amp; Sprints</a:t>
             </a:r>
           </a:p>
         </p:txBody>
@@ -8502,7 +10094,869 @@
 </p:sld>
 </file>
 
-<file path=ppt/slides/slide12.xml><?xml version="1.0" encoding="utf-8"?>
+<file path=ppt/slides/slide15.xml><?xml version="1.0" encoding="utf-8"?>
+<p:sld xmlns:a="http://schemas.openxmlformats.org/drawingml/2006/main" xmlns:r="http://schemas.openxmlformats.org/officeDocument/2006/relationships" xmlns:p="http://schemas.openxmlformats.org/presentationml/2006/main">
+  <p:cSld>
+    <p:spTree>
+      <p:nvGrpSpPr>
+        <p:cNvPr id="1" name=""/>
+        <p:cNvGrpSpPr/>
+        <p:nvPr/>
+      </p:nvGrpSpPr>
+      <p:grpSpPr>
+        <a:xfrm>
+          <a:off x="0" y="0"/>
+          <a:ext cx="0" cy="0"/>
+          <a:chOff x="0" y="0"/>
+          <a:chExt cx="0" cy="0"/>
+        </a:xfrm>
+      </p:grpSpPr>
+      <p:sp>
+        <p:nvSpPr>
+          <p:cNvPr id="5" name="Shape 0">
+            <a:extLst>
+              <a:ext uri="{FF2B5EF4-FFF2-40B4-BE49-F238E27FC236}">
+                <a16:creationId xmlns:a16="http://schemas.microsoft.com/office/drawing/2014/main" id="{130AD00A-EBB2-7493-772E-8F22B0BC782E}"/>
+              </a:ext>
+            </a:extLst>
+          </p:cNvPr>
+          <p:cNvSpPr/>
+          <p:nvPr/>
+        </p:nvSpPr>
+        <p:spPr>
+          <a:xfrm>
+            <a:off x="0" y="0"/>
+            <a:ext cx="12192000" cy="1005840"/>
+          </a:xfrm>
+          <a:prstGeom prst="rect">
+            <a:avLst/>
+          </a:prstGeom>
+          <a:solidFill>
+            <a:srgbClr val="1E3A5F"/>
+          </a:solidFill>
+          <a:ln w="12700">
+            <a:solidFill>
+              <a:srgbClr val="1E3A5F"/>
+            </a:solidFill>
+            <a:prstDash val="solid"/>
+          </a:ln>
+        </p:spPr>
+        <p:txBody>
+          <a:bodyPr/>
+          <a:lstStyle/>
+          <a:p>
+            <a:endParaRPr lang="es-ES" dirty="0">
+              <a:solidFill>
+                <a:schemeClr val="bg1"/>
+              </a:solidFill>
+            </a:endParaRPr>
+          </a:p>
+        </p:txBody>
+      </p:sp>
+      <p:sp>
+        <p:nvSpPr>
+          <p:cNvPr id="6" name="TextBox 5">
+            <a:extLst>
+              <a:ext uri="{FF2B5EF4-FFF2-40B4-BE49-F238E27FC236}">
+                <a16:creationId xmlns:a16="http://schemas.microsoft.com/office/drawing/2014/main" id="{93B3A6C5-B5B5-3970-565E-225CEA7A6A6A}"/>
+              </a:ext>
+            </a:extLst>
+          </p:cNvPr>
+          <p:cNvSpPr txBox="1"/>
+          <p:nvPr/>
+        </p:nvSpPr>
+        <p:spPr>
+          <a:xfrm>
+            <a:off x="339365" y="235670"/>
+            <a:ext cx="7032396" cy="584775"/>
+          </a:xfrm>
+          <a:prstGeom prst="rect">
+            <a:avLst/>
+          </a:prstGeom>
+          <a:noFill/>
+        </p:spPr>
+        <p:txBody>
+          <a:bodyPr wrap="square" rtlCol="0">
+            <a:spAutoFit/>
+          </a:bodyPr>
+          <a:lstStyle/>
+          <a:p>
+            <a:r>
+              <a:rPr lang="es-ES" sz="3200" b="1" dirty="0">
+                <a:solidFill>
+                  <a:schemeClr val="bg1"/>
+                </a:solidFill>
+              </a:rPr>
+              <a:t>08 —  Démonstration</a:t>
+            </a:r>
+          </a:p>
+        </p:txBody>
+      </p:sp>
+      <p:sp>
+        <p:nvSpPr>
+          <p:cNvPr id="7" name="Shape 14">
+            <a:extLst>
+              <a:ext uri="{FF2B5EF4-FFF2-40B4-BE49-F238E27FC236}">
+                <a16:creationId xmlns:a16="http://schemas.microsoft.com/office/drawing/2014/main" id="{B4ED0B7F-9464-AFAA-8896-A8BAA3D014F8}"/>
+              </a:ext>
+            </a:extLst>
+          </p:cNvPr>
+          <p:cNvSpPr/>
+          <p:nvPr/>
+        </p:nvSpPr>
+        <p:spPr>
+          <a:xfrm>
+            <a:off x="11482791" y="6331984"/>
+            <a:ext cx="502920" cy="365760"/>
+          </a:xfrm>
+          <a:prstGeom prst="rect">
+            <a:avLst/>
+          </a:prstGeom>
+          <a:solidFill>
+            <a:srgbClr val="1E3A5F"/>
+          </a:solidFill>
+          <a:ln w="12700">
+            <a:solidFill>
+              <a:srgbClr val="1E3A5F"/>
+            </a:solidFill>
+            <a:prstDash val="solid"/>
+          </a:ln>
+        </p:spPr>
+        <p:txBody>
+          <a:bodyPr/>
+          <a:lstStyle/>
+          <a:p>
+            <a:r>
+              <a:rPr lang="es-ES" sz="1800" b="1" dirty="0">
+                <a:solidFill>
+                  <a:schemeClr val="bg1"/>
+                </a:solidFill>
+              </a:rPr>
+              <a:t>  </a:t>
+            </a:r>
+            <a:r>
+              <a:rPr lang="es-ES" b="1" dirty="0">
+                <a:solidFill>
+                  <a:schemeClr val="bg1"/>
+                </a:solidFill>
+              </a:rPr>
+              <a:t>9</a:t>
+            </a:r>
+            <a:endParaRPr lang="es-ES" sz="1800" b="1" dirty="0">
+              <a:solidFill>
+                <a:schemeClr val="bg1"/>
+              </a:solidFill>
+            </a:endParaRPr>
+          </a:p>
+        </p:txBody>
+      </p:sp>
+    </p:spTree>
+    <p:extLst>
+      <p:ext uri="{BB962C8B-B14F-4D97-AF65-F5344CB8AC3E}">
+        <p14:creationId xmlns:p14="http://schemas.microsoft.com/office/powerpoint/2010/main" val="248430642"/>
+      </p:ext>
+    </p:extLst>
+  </p:cSld>
+  <p:clrMapOvr>
+    <a:masterClrMapping/>
+  </p:clrMapOvr>
+</p:sld>
+</file>
+
+<file path=ppt/slides/slide16.xml><?xml version="1.0" encoding="utf-8"?>
+<p:sld xmlns:a="http://schemas.openxmlformats.org/drawingml/2006/main" xmlns:r="http://schemas.openxmlformats.org/officeDocument/2006/relationships" xmlns:p="http://schemas.openxmlformats.org/presentationml/2006/main">
+  <p:cSld>
+    <p:spTree>
+      <p:nvGrpSpPr>
+        <p:cNvPr id="1" name=""/>
+        <p:cNvGrpSpPr/>
+        <p:nvPr/>
+      </p:nvGrpSpPr>
+      <p:grpSpPr>
+        <a:xfrm>
+          <a:off x="0" y="0"/>
+          <a:ext cx="0" cy="0"/>
+          <a:chOff x="0" y="0"/>
+          <a:chExt cx="0" cy="0"/>
+        </a:xfrm>
+      </p:grpSpPr>
+      <p:sp>
+        <p:nvSpPr>
+          <p:cNvPr id="5" name="TextBox 4"/>
+          <p:cNvSpPr txBox="1"/>
+          <p:nvPr/>
+        </p:nvSpPr>
+        <p:spPr>
+          <a:xfrm>
+            <a:off x="365760" y="1097280"/>
+            <a:ext cx="3931920" cy="457200"/>
+          </a:xfrm>
+          <a:prstGeom prst="rect">
+            <a:avLst/>
+          </a:prstGeom>
+          <a:noFill/>
+        </p:spPr>
+        <p:txBody>
+          <a:bodyPr wrap="square">
+            <a:spAutoFit/>
+          </a:bodyPr>
+          <a:lstStyle/>
+          <a:p>
+            <a:pPr algn="l"/>
+            <a:r>
+              <a:rPr sz="1800" b="1">
+                <a:solidFill>
+                  <a:srgbClr val="10B981"/>
+                </a:solidFill>
+              </a:rPr>
+              <a:t>✅  Ce qui a été livré</a:t>
+            </a:r>
+          </a:p>
+        </p:txBody>
+      </p:sp>
+      <p:sp>
+        <p:nvSpPr>
+          <p:cNvPr id="6" name="TextBox 5"/>
+          <p:cNvSpPr txBox="1"/>
+          <p:nvPr/>
+        </p:nvSpPr>
+        <p:spPr>
+          <a:xfrm>
+            <a:off x="365760" y="1645920"/>
+            <a:ext cx="5730240" cy="2693045"/>
+          </a:xfrm>
+          <a:prstGeom prst="rect">
+            <a:avLst/>
+          </a:prstGeom>
+          <a:noFill/>
+        </p:spPr>
+        <p:txBody>
+          <a:bodyPr wrap="square">
+            <a:spAutoFit/>
+          </a:bodyPr>
+          <a:lstStyle/>
+          <a:p>
+            <a:pPr>
+              <a:spcBef>
+                <a:spcPts val="500"/>
+              </a:spcBef>
+            </a:pPr>
+            <a:r>
+              <a:rPr sz="1800" dirty="0">
+                <a:solidFill>
+                  <a:srgbClr val="1E293B"/>
+                </a:solidFill>
+              </a:rPr>
+              <a:t>✓  Plateforme Full</a:t>
+            </a:r>
+            <a:r>
+              <a:rPr lang="es-ES" sz="1800" dirty="0">
+                <a:solidFill>
+                  <a:srgbClr val="1E293B"/>
+                </a:solidFill>
+              </a:rPr>
+              <a:t>-</a:t>
+            </a:r>
+            <a:r>
+              <a:rPr sz="1800" dirty="0">
+                <a:solidFill>
+                  <a:srgbClr val="1E293B"/>
+                </a:solidFill>
+              </a:rPr>
+              <a:t>stack </a:t>
+            </a:r>
+            <a:r>
+              <a:rPr sz="1800" dirty="0" err="1">
+                <a:solidFill>
+                  <a:srgbClr val="1E293B"/>
+                </a:solidFill>
+              </a:rPr>
+              <a:t>fonctionnelle</a:t>
+            </a:r>
+            <a:r>
+              <a:rPr sz="1800" dirty="0">
+                <a:solidFill>
+                  <a:srgbClr val="1E293B"/>
+                </a:solidFill>
+              </a:rPr>
+              <a:t> (React + Node + MySQL)</a:t>
+            </a:r>
+          </a:p>
+          <a:p>
+            <a:pPr>
+              <a:spcBef>
+                <a:spcPts val="500"/>
+              </a:spcBef>
+            </a:pPr>
+            <a:r>
+              <a:rPr sz="1800" dirty="0">
+                <a:solidFill>
+                  <a:srgbClr val="1E293B"/>
+                </a:solidFill>
+              </a:rPr>
+              <a:t>✓  134 points story </a:t>
+            </a:r>
+            <a:r>
+              <a:rPr sz="1800" dirty="0" err="1">
+                <a:solidFill>
+                  <a:srgbClr val="1E293B"/>
+                </a:solidFill>
+              </a:rPr>
+              <a:t>livrés</a:t>
+            </a:r>
+            <a:r>
+              <a:rPr sz="1800" dirty="0">
+                <a:solidFill>
+                  <a:srgbClr val="1E293B"/>
+                </a:solidFill>
+              </a:rPr>
+              <a:t> sur 5 sprints (100%)</a:t>
+            </a:r>
+          </a:p>
+          <a:p>
+            <a:pPr>
+              <a:spcBef>
+                <a:spcPts val="500"/>
+              </a:spcBef>
+            </a:pPr>
+            <a:r>
+              <a:rPr sz="1800" dirty="0">
+                <a:solidFill>
+                  <a:srgbClr val="1E293B"/>
+                </a:solidFill>
+              </a:rPr>
+              <a:t>✓  RBAC complet, JWT </a:t>
+            </a:r>
+            <a:r>
+              <a:rPr sz="1800" dirty="0" err="1">
+                <a:solidFill>
+                  <a:srgbClr val="1E293B"/>
+                </a:solidFill>
+              </a:rPr>
+              <a:t>sécurisé</a:t>
+            </a:r>
+            <a:r>
+              <a:rPr sz="1800" dirty="0">
+                <a:solidFill>
+                  <a:srgbClr val="1E293B"/>
+                </a:solidFill>
+              </a:rPr>
+              <a:t>, </a:t>
+            </a:r>
+            <a:r>
+              <a:rPr sz="1800" dirty="0" err="1">
+                <a:solidFill>
+                  <a:srgbClr val="1E293B"/>
+                </a:solidFill>
+              </a:rPr>
+              <a:t>bcrypt</a:t>
+            </a:r>
+            <a:r>
+              <a:rPr sz="1800" dirty="0">
+                <a:solidFill>
+                  <a:srgbClr val="1E293B"/>
+                </a:solidFill>
+              </a:rPr>
+              <a:t> Round 10</a:t>
+            </a:r>
+          </a:p>
+          <a:p>
+            <a:pPr>
+              <a:spcBef>
+                <a:spcPts val="500"/>
+              </a:spcBef>
+            </a:pPr>
+            <a:r>
+              <a:rPr sz="1800" dirty="0">
+                <a:solidFill>
+                  <a:srgbClr val="1E293B"/>
+                </a:solidFill>
+              </a:rPr>
+              <a:t>✓  Système de commissions </a:t>
+            </a:r>
+            <a:r>
+              <a:rPr sz="1800" dirty="0" err="1">
+                <a:solidFill>
+                  <a:srgbClr val="1E293B"/>
+                </a:solidFill>
+              </a:rPr>
+              <a:t>automatisées</a:t>
+            </a:r>
+            <a:r>
+              <a:rPr sz="1800" dirty="0">
+                <a:solidFill>
+                  <a:srgbClr val="1E293B"/>
+                </a:solidFill>
+              </a:rPr>
+              <a:t> (10% + 5%)</a:t>
+            </a:r>
+          </a:p>
+          <a:p>
+            <a:pPr>
+              <a:spcBef>
+                <a:spcPts val="500"/>
+              </a:spcBef>
+            </a:pPr>
+            <a:r>
+              <a:rPr sz="1800" dirty="0">
+                <a:solidFill>
+                  <a:srgbClr val="1E293B"/>
+                </a:solidFill>
+              </a:rPr>
+              <a:t>✓  5 sponsors </a:t>
+            </a:r>
+            <a:r>
+              <a:rPr sz="1800" dirty="0" err="1">
+                <a:solidFill>
+                  <a:srgbClr val="1E293B"/>
+                </a:solidFill>
+              </a:rPr>
+              <a:t>réels</a:t>
+            </a:r>
+            <a:r>
+              <a:rPr sz="1800" dirty="0">
+                <a:solidFill>
+                  <a:srgbClr val="1E293B"/>
+                </a:solidFill>
+              </a:rPr>
+              <a:t> </a:t>
+            </a:r>
+            <a:r>
+              <a:rPr sz="1800" dirty="0" err="1">
+                <a:solidFill>
+                  <a:srgbClr val="1E293B"/>
+                </a:solidFill>
+              </a:rPr>
+              <a:t>intégrés</a:t>
+            </a:r>
+            <a:r>
+              <a:rPr sz="1800" dirty="0">
+                <a:solidFill>
+                  <a:srgbClr val="1E293B"/>
+                </a:solidFill>
+              </a:rPr>
+              <a:t> avec </a:t>
+            </a:r>
+            <a:r>
+              <a:rPr sz="1800" dirty="0" err="1">
+                <a:solidFill>
+                  <a:srgbClr val="1E293B"/>
+                </a:solidFill>
+              </a:rPr>
+              <a:t>espace</a:t>
+            </a:r>
+            <a:r>
+              <a:rPr sz="1800" dirty="0">
+                <a:solidFill>
+                  <a:srgbClr val="1E293B"/>
+                </a:solidFill>
+              </a:rPr>
+              <a:t> </a:t>
+            </a:r>
+            <a:r>
+              <a:rPr sz="1800" dirty="0" err="1">
+                <a:solidFill>
+                  <a:srgbClr val="1E293B"/>
+                </a:solidFill>
+              </a:rPr>
+              <a:t>dynamique</a:t>
+            </a:r>
+            <a:endParaRPr sz="1800" dirty="0">
+              <a:solidFill>
+                <a:srgbClr val="1E293B"/>
+              </a:solidFill>
+            </a:endParaRPr>
+          </a:p>
+          <a:p>
+            <a:pPr>
+              <a:spcBef>
+                <a:spcPts val="500"/>
+              </a:spcBef>
+            </a:pPr>
+            <a:r>
+              <a:rPr sz="1800" dirty="0">
+                <a:solidFill>
+                  <a:srgbClr val="1E293B"/>
+                </a:solidFill>
+              </a:rPr>
+              <a:t>✓  Documentation Swagger </a:t>
+            </a:r>
+            <a:r>
+              <a:rPr sz="1800" dirty="0" err="1">
+                <a:solidFill>
+                  <a:srgbClr val="1E293B"/>
+                </a:solidFill>
+              </a:rPr>
+              <a:t>complète</a:t>
+            </a:r>
+            <a:r>
+              <a:rPr sz="1800" dirty="0">
+                <a:solidFill>
+                  <a:srgbClr val="1E293B"/>
+                </a:solidFill>
+              </a:rPr>
+              <a:t> sur /</a:t>
+            </a:r>
+            <a:r>
+              <a:rPr sz="1800" dirty="0" err="1">
+                <a:solidFill>
+                  <a:srgbClr val="1E293B"/>
+                </a:solidFill>
+              </a:rPr>
+              <a:t>api</a:t>
+            </a:r>
+            <a:r>
+              <a:rPr sz="1800" dirty="0">
+                <a:solidFill>
+                  <a:srgbClr val="1E293B"/>
+                </a:solidFill>
+              </a:rPr>
+              <a:t>-docs</a:t>
+            </a:r>
+          </a:p>
+          <a:p>
+            <a:pPr>
+              <a:spcBef>
+                <a:spcPts val="500"/>
+              </a:spcBef>
+            </a:pPr>
+            <a:r>
+              <a:rPr sz="1800" dirty="0">
+                <a:solidFill>
+                  <a:srgbClr val="1E293B"/>
+                </a:solidFill>
+              </a:rPr>
+              <a:t>✓  Cron jobs : rappels, </a:t>
+            </a:r>
+            <a:r>
+              <a:rPr sz="1800" dirty="0" err="1">
+                <a:solidFill>
+                  <a:srgbClr val="1E293B"/>
+                </a:solidFill>
+              </a:rPr>
+              <a:t>révocation</a:t>
+            </a:r>
+            <a:r>
+              <a:rPr sz="1800" dirty="0">
+                <a:solidFill>
+                  <a:srgbClr val="1E293B"/>
+                </a:solidFill>
+              </a:rPr>
+              <a:t> Premium, </a:t>
+            </a:r>
+            <a:r>
+              <a:rPr sz="1800" dirty="0" err="1">
+                <a:solidFill>
+                  <a:srgbClr val="1E293B"/>
+                </a:solidFill>
+              </a:rPr>
+              <a:t>archivage</a:t>
+            </a:r>
+            <a:endParaRPr sz="1800" dirty="0">
+              <a:solidFill>
+                <a:srgbClr val="1E293B"/>
+              </a:solidFill>
+            </a:endParaRPr>
+          </a:p>
+        </p:txBody>
+      </p:sp>
+      <p:sp>
+        <p:nvSpPr>
+          <p:cNvPr id="7" name="TextBox 6"/>
+          <p:cNvSpPr txBox="1"/>
+          <p:nvPr/>
+        </p:nvSpPr>
+        <p:spPr>
+          <a:xfrm>
+            <a:off x="6537960" y="1188720"/>
+            <a:ext cx="4297680" cy="457200"/>
+          </a:xfrm>
+          <a:prstGeom prst="rect">
+            <a:avLst/>
+          </a:prstGeom>
+          <a:noFill/>
+        </p:spPr>
+        <p:txBody>
+          <a:bodyPr wrap="square">
+            <a:spAutoFit/>
+          </a:bodyPr>
+          <a:lstStyle/>
+          <a:p>
+            <a:pPr algn="l"/>
+            <a:r>
+              <a:rPr sz="1800" b="1" dirty="0">
+                <a:solidFill>
+                  <a:srgbClr val="1A56DB"/>
+                </a:solidFill>
+              </a:rPr>
+              <a:t>🚀  Perspectives v2.0</a:t>
+            </a:r>
+          </a:p>
+        </p:txBody>
+      </p:sp>
+      <p:sp>
+        <p:nvSpPr>
+          <p:cNvPr id="8" name="TextBox 7"/>
+          <p:cNvSpPr txBox="1"/>
+          <p:nvPr/>
+        </p:nvSpPr>
+        <p:spPr>
+          <a:xfrm>
+            <a:off x="6196238" y="1815602"/>
+            <a:ext cx="7604603" cy="2416046"/>
+          </a:xfrm>
+          <a:prstGeom prst="rect">
+            <a:avLst/>
+          </a:prstGeom>
+          <a:noFill/>
+        </p:spPr>
+        <p:txBody>
+          <a:bodyPr wrap="square">
+            <a:spAutoFit/>
+          </a:bodyPr>
+          <a:lstStyle/>
+          <a:p>
+            <a:pPr>
+              <a:spcBef>
+                <a:spcPts val="500"/>
+              </a:spcBef>
+            </a:pPr>
+            <a:r>
+              <a:rPr sz="1800">
+                <a:solidFill>
+                  <a:srgbClr val="0EA5E9"/>
+                </a:solidFill>
+              </a:rPr>
+              <a:t>→  Intégration paiement en ligne (Stripe / Bankily API)</a:t>
+            </a:r>
+          </a:p>
+          <a:p>
+            <a:pPr>
+              <a:spcBef>
+                <a:spcPts val="500"/>
+              </a:spcBef>
+            </a:pPr>
+            <a:r>
+              <a:rPr sz="1800">
+                <a:solidFill>
+                  <a:srgbClr val="0EA5E9"/>
+                </a:solidFill>
+              </a:rPr>
+              <a:t>→  Application mobile React Native</a:t>
+            </a:r>
+          </a:p>
+          <a:p>
+            <a:pPr>
+              <a:spcBef>
+                <a:spcPts val="500"/>
+              </a:spcBef>
+            </a:pPr>
+            <a:r>
+              <a:rPr sz="1800">
+                <a:solidFill>
+                  <a:srgbClr val="0EA5E9"/>
+                </a:solidFill>
+              </a:rPr>
+              <a:t>→  Messagerie interne entre membres et responsables</a:t>
+            </a:r>
+          </a:p>
+          <a:p>
+            <a:pPr>
+              <a:spcBef>
+                <a:spcPts val="500"/>
+              </a:spcBef>
+            </a:pPr>
+            <a:r>
+              <a:rPr sz="1800">
+                <a:solidFill>
+                  <a:srgbClr val="0EA5E9"/>
+                </a:solidFill>
+              </a:rPr>
+              <a:t>→  Système de votes et sondages associatifs</a:t>
+            </a:r>
+          </a:p>
+          <a:p>
+            <a:pPr>
+              <a:spcBef>
+                <a:spcPts val="500"/>
+              </a:spcBef>
+            </a:pPr>
+            <a:r>
+              <a:rPr sz="1800">
+                <a:solidFill>
+                  <a:srgbClr val="0EA5E9"/>
+                </a:solidFill>
+              </a:rPr>
+              <a:t>→  Déploiement cloud (VPS / hébergement Mauritanien)</a:t>
+            </a:r>
+          </a:p>
+          <a:p>
+            <a:pPr>
+              <a:spcBef>
+                <a:spcPts val="500"/>
+              </a:spcBef>
+            </a:pPr>
+            <a:r>
+              <a:rPr sz="1800">
+                <a:solidFill>
+                  <a:srgbClr val="0EA5E9"/>
+                </a:solidFill>
+              </a:rPr>
+              <a:t>→  Tableau de bord analytique avancé (graphiques D3.js)</a:t>
+            </a:r>
+          </a:p>
+          <a:p>
+            <a:pPr>
+              <a:spcBef>
+                <a:spcPts val="500"/>
+              </a:spcBef>
+            </a:pPr>
+            <a:r>
+              <a:rPr sz="1800">
+                <a:solidFill>
+                  <a:srgbClr val="0EA5E9"/>
+                </a:solidFill>
+              </a:rPr>
+              <a:t>→  Module candidature aux postes de bureau d'asso</a:t>
+            </a:r>
+          </a:p>
+        </p:txBody>
+      </p:sp>
+      <p:sp>
+        <p:nvSpPr>
+          <p:cNvPr id="10" name="Shape 0">
+            <a:extLst>
+              <a:ext uri="{FF2B5EF4-FFF2-40B4-BE49-F238E27FC236}">
+                <a16:creationId xmlns:a16="http://schemas.microsoft.com/office/drawing/2014/main" id="{930B4CCE-DE34-5941-45A9-215D744F0BC6}"/>
+              </a:ext>
+            </a:extLst>
+          </p:cNvPr>
+          <p:cNvSpPr/>
+          <p:nvPr/>
+        </p:nvSpPr>
+        <p:spPr>
+          <a:xfrm>
+            <a:off x="0" y="0"/>
+            <a:ext cx="12192000" cy="1005840"/>
+          </a:xfrm>
+          <a:prstGeom prst="rect">
+            <a:avLst/>
+          </a:prstGeom>
+          <a:solidFill>
+            <a:srgbClr val="1E3A5F"/>
+          </a:solidFill>
+          <a:ln w="12700">
+            <a:solidFill>
+              <a:srgbClr val="1E3A5F"/>
+            </a:solidFill>
+            <a:prstDash val="solid"/>
+          </a:ln>
+        </p:spPr>
+        <p:txBody>
+          <a:bodyPr/>
+          <a:lstStyle/>
+          <a:p>
+            <a:endParaRPr lang="es-ES" dirty="0">
+              <a:solidFill>
+                <a:schemeClr val="bg1"/>
+              </a:solidFill>
+            </a:endParaRPr>
+          </a:p>
+        </p:txBody>
+      </p:sp>
+      <p:sp>
+        <p:nvSpPr>
+          <p:cNvPr id="11" name="TextBox 10">
+            <a:extLst>
+              <a:ext uri="{FF2B5EF4-FFF2-40B4-BE49-F238E27FC236}">
+                <a16:creationId xmlns:a16="http://schemas.microsoft.com/office/drawing/2014/main" id="{BE4A3C25-9BA5-876D-8D06-D315D087D74D}"/>
+              </a:ext>
+            </a:extLst>
+          </p:cNvPr>
+          <p:cNvSpPr txBox="1"/>
+          <p:nvPr/>
+        </p:nvSpPr>
+        <p:spPr>
+          <a:xfrm>
+            <a:off x="179109" y="131975"/>
+            <a:ext cx="7692272" cy="584775"/>
+          </a:xfrm>
+          <a:prstGeom prst="rect">
+            <a:avLst/>
+          </a:prstGeom>
+          <a:noFill/>
+        </p:spPr>
+        <p:txBody>
+          <a:bodyPr wrap="square" rtlCol="0">
+            <a:spAutoFit/>
+          </a:bodyPr>
+          <a:lstStyle/>
+          <a:p>
+            <a:r>
+              <a:rPr lang="es-ES" sz="3200" b="1" dirty="0">
+                <a:solidFill>
+                  <a:schemeClr val="bg1"/>
+                </a:solidFill>
+              </a:rPr>
+              <a:t>09 — Bilan &amp; Perspectives</a:t>
+            </a:r>
+          </a:p>
+        </p:txBody>
+      </p:sp>
+      <p:sp>
+        <p:nvSpPr>
+          <p:cNvPr id="12" name="Shape 14">
+            <a:extLst>
+              <a:ext uri="{FF2B5EF4-FFF2-40B4-BE49-F238E27FC236}">
+                <a16:creationId xmlns:a16="http://schemas.microsoft.com/office/drawing/2014/main" id="{C67E80A2-9D93-18C3-B5CB-D685D2D23411}"/>
+              </a:ext>
+            </a:extLst>
+          </p:cNvPr>
+          <p:cNvSpPr/>
+          <p:nvPr/>
+        </p:nvSpPr>
+        <p:spPr>
+          <a:xfrm>
+            <a:off x="11340445" y="6331984"/>
+            <a:ext cx="645266" cy="365760"/>
+          </a:xfrm>
+          <a:prstGeom prst="rect">
+            <a:avLst/>
+          </a:prstGeom>
+          <a:solidFill>
+            <a:srgbClr val="1E3A5F"/>
+          </a:solidFill>
+          <a:ln w="12700">
+            <a:solidFill>
+              <a:srgbClr val="1E3A5F"/>
+            </a:solidFill>
+            <a:prstDash val="solid"/>
+          </a:ln>
+        </p:spPr>
+        <p:txBody>
+          <a:bodyPr/>
+          <a:lstStyle/>
+          <a:p>
+            <a:r>
+              <a:rPr lang="es-ES" sz="1800" b="1" dirty="0">
+                <a:solidFill>
+                  <a:schemeClr val="bg1"/>
+                </a:solidFill>
+              </a:rPr>
+              <a:t>  10</a:t>
+            </a:r>
+          </a:p>
+        </p:txBody>
+      </p:sp>
+    </p:spTree>
+  </p:cSld>
+  <p:clrMapOvr>
+    <a:masterClrMapping/>
+  </p:clrMapOvr>
+</p:sld>
+</file>
+
+<file path=ppt/slides/slide17.xml><?xml version="1.0" encoding="utf-8"?>
 <p:sld xmlns:a="http://schemas.openxmlformats.org/drawingml/2006/main" xmlns:r="http://schemas.openxmlformats.org/officeDocument/2006/relationships" xmlns:p="http://schemas.openxmlformats.org/presentationml/2006/main">
   <p:cSld>
     <p:spTree>
@@ -13056,7 +15510,13 @@
   <p:cSld>
     <p:spTree>
       <p:nvGrpSpPr>
-        <p:cNvPr id="1" name=""/>
+        <p:cNvPr id="1" name="">
+          <a:extLst>
+            <a:ext uri="{FF2B5EF4-FFF2-40B4-BE49-F238E27FC236}">
+              <a16:creationId xmlns:a16="http://schemas.microsoft.com/office/drawing/2014/main" id="{FCCBA5EB-7A21-4E80-C6E5-BE060CECB8D2}"/>
+            </a:ext>
+          </a:extLst>
+        </p:cNvPr>
         <p:cNvGrpSpPr/>
         <p:nvPr/>
       </p:nvGrpSpPr>
@@ -13073,7 +15533,7 @@
           <p:cNvPr id="5" name="Shape 0">
             <a:extLst>
               <a:ext uri="{FF2B5EF4-FFF2-40B4-BE49-F238E27FC236}">
-                <a16:creationId xmlns:a16="http://schemas.microsoft.com/office/drawing/2014/main" id="{F1F13BC7-E726-E517-D4EA-825CCF768837}"/>
+                <a16:creationId xmlns:a16="http://schemas.microsoft.com/office/drawing/2014/main" id="{FED45046-6BF0-B2D3-18EA-2C2F0D0E656A}"/>
               </a:ext>
             </a:extLst>
           </p:cNvPr>
@@ -13102,10 +15562,36 @@
           <a:bodyPr/>
           <a:lstStyle/>
           <a:p>
-            <a:endParaRPr lang="es-ES" dirty="0">
+            <a:pPr marL="0" marR="0" lvl="0" indent="0" algn="l" defTabSz="914400" rtl="0" eaLnBrk="1" fontAlgn="auto" latinLnBrk="0" hangingPunct="1">
+              <a:lnSpc>
+                <a:spcPct val="100000"/>
+              </a:lnSpc>
+              <a:spcBef>
+                <a:spcPts val="0"/>
+              </a:spcBef>
+              <a:spcAft>
+                <a:spcPts val="0"/>
+              </a:spcAft>
+              <a:buClrTx/>
+              <a:buSzTx/>
+              <a:buFontTx/>
+              <a:buNone/>
+              <a:tabLst/>
+              <a:defRPr/>
+            </a:pPr>
+            <a:endParaRPr kumimoji="0" lang="es-ES" sz="1800" b="0" i="0" u="none" strike="noStrike" kern="1200" cap="none" spc="0" normalizeH="0" baseline="0" noProof="0" dirty="0">
+              <a:ln>
+                <a:noFill/>
+              </a:ln>
               <a:solidFill>
-                <a:schemeClr val="bg1"/>
+                <a:prstClr val="white"/>
               </a:solidFill>
+              <a:effectLst/>
+              <a:uLnTx/>
+              <a:uFillTx/>
+              <a:latin typeface="Calibri" panose="020F0502020204030204"/>
+              <a:ea typeface="+mn-ea"/>
+              <a:cs typeface="+mn-cs"/>
             </a:endParaRPr>
           </a:p>
         </p:txBody>
@@ -13115,7 +15601,7 @@
           <p:cNvPr id="6" name="TextBox 5">
             <a:extLst>
               <a:ext uri="{FF2B5EF4-FFF2-40B4-BE49-F238E27FC236}">
-                <a16:creationId xmlns:a16="http://schemas.microsoft.com/office/drawing/2014/main" id="{F7319964-40C2-6528-DB49-16BCEC5C197A}"/>
+                <a16:creationId xmlns:a16="http://schemas.microsoft.com/office/drawing/2014/main" id="{02EA36D3-EB7F-2F61-06B7-0D1503EA7397}"/>
               </a:ext>
             </a:extLst>
           </p:cNvPr>
@@ -13125,7 +15611,7 @@
         <p:spPr>
           <a:xfrm>
             <a:off x="546755" y="226243"/>
-            <a:ext cx="5684363" cy="584775"/>
+            <a:ext cx="8973165" cy="584775"/>
           </a:xfrm>
           <a:prstGeom prst="rect">
             <a:avLst/>
@@ -13138,14 +15624,87 @@
           </a:bodyPr>
           <a:lstStyle/>
           <a:p>
+            <a:pPr lvl="0"/>
+            <a:r>
+              <a:rPr kumimoji="0" lang="es-ES" sz="3200" b="1" i="0" u="none" strike="noStrike" kern="1200" cap="none" spc="0" normalizeH="0" baseline="0" noProof="0" dirty="0">
+                <a:ln>
+                  <a:noFill/>
+                </a:ln>
+                <a:solidFill>
+                  <a:prstClr val="white"/>
+                </a:solidFill>
+                <a:effectLst/>
+                <a:uLnTx/>
+                <a:uFillTx/>
+                <a:latin typeface="Calibri" panose="020F0502020204030204"/>
+                <a:ea typeface="+mn-ea"/>
+                <a:cs typeface="+mn-cs"/>
+              </a:rPr>
+              <a:t>06 — </a:t>
+            </a:r>
+            <a:r>
+              <a:rPr kumimoji="0" lang="es-ES" sz="3200" b="1" i="0" u="none" strike="noStrike" kern="1200" cap="none" spc="0" normalizeH="0" baseline="0" noProof="0" dirty="0" err="1">
+                <a:ln>
+                  <a:noFill/>
+                </a:ln>
+                <a:solidFill>
+                  <a:prstClr val="white"/>
+                </a:solidFill>
+                <a:effectLst/>
+                <a:uLnTx/>
+                <a:uFillTx/>
+                <a:latin typeface="Calibri" panose="020F0502020204030204"/>
+                <a:ea typeface="+mn-ea"/>
+                <a:cs typeface="+mn-cs"/>
+              </a:rPr>
+              <a:t>Conceptions</a:t>
+            </a:r>
             <a:r>
               <a:rPr lang="es-ES" sz="3200" b="1" dirty="0">
                 <a:solidFill>
-                  <a:schemeClr val="bg1"/>
-                </a:solidFill>
-              </a:rPr>
-              <a:t>06 — Conceptions</a:t>
-            </a:r>
+                  <a:prstClr val="white"/>
+                </a:solidFill>
+              </a:rPr>
+              <a:t> - </a:t>
+            </a:r>
+            <a:r>
+              <a:rPr lang="es-ES" sz="3200" b="1" dirty="0" err="1">
+                <a:solidFill>
+                  <a:prstClr val="white"/>
+                </a:solidFill>
+              </a:rPr>
+              <a:t>Diagramme</a:t>
+            </a:r>
+            <a:r>
+              <a:rPr lang="es-ES" sz="3200" b="1" dirty="0">
+                <a:solidFill>
+                  <a:prstClr val="white"/>
+                </a:solidFill>
+              </a:rPr>
+              <a:t> de cas </a:t>
+            </a:r>
+            <a:r>
+              <a:rPr lang="es-ES" sz="3200" b="1" dirty="0" err="1">
+                <a:solidFill>
+                  <a:prstClr val="white"/>
+                </a:solidFill>
+              </a:rPr>
+              <a:t>d'utilisation</a:t>
+            </a:r>
+            <a:endParaRPr kumimoji="0" lang="es-ES" sz="3200" b="1" i="0" u="none" strike="noStrike" kern="1200" cap="none" spc="0" normalizeH="0" baseline="0" noProof="0" dirty="0">
+              <a:ln>
+                <a:noFill/>
+              </a:ln>
+              <a:solidFill>
+                <a:prstClr val="white"/>
+              </a:solidFill>
+              <a:effectLst/>
+              <a:uLnTx/>
+              <a:uFillTx/>
+              <a:latin typeface="Calibri" panose="020F0502020204030204"/>
+              <a:ea typeface="+mn-ea"/>
+              <a:cs typeface="+mn-cs"/>
+            </a:endParaRPr>
           </a:p>
         </p:txBody>
       </p:sp>
@@ -13154,7 +15713,7 @@
           <p:cNvPr id="8" name="Shape 14">
             <a:extLst>
               <a:ext uri="{FF2B5EF4-FFF2-40B4-BE49-F238E27FC236}">
-                <a16:creationId xmlns:a16="http://schemas.microsoft.com/office/drawing/2014/main" id="{FEBEDAF1-730B-95FE-8904-062FAD925842}"/>
+                <a16:creationId xmlns:a16="http://schemas.microsoft.com/office/drawing/2014/main" id="{ED436377-9273-7BE0-E399-D2B9C4C17E92}"/>
               </a:ext>
             </a:extLst>
           </p:cNvPr>
@@ -13183,21 +15742,77 @@
           <a:bodyPr/>
           <a:lstStyle/>
           <a:p>
-            <a:r>
-              <a:rPr lang="es-ES" sz="1800" b="1" dirty="0">
-                <a:solidFill>
-                  <a:schemeClr val="bg1"/>
-                </a:solidFill>
+            <a:pPr marL="0" marR="0" lvl="0" indent="0" algn="l" defTabSz="914400" rtl="0" eaLnBrk="1" fontAlgn="auto" latinLnBrk="0" hangingPunct="1">
+              <a:lnSpc>
+                <a:spcPct val="100000"/>
+              </a:lnSpc>
+              <a:spcBef>
+                <a:spcPts val="0"/>
+              </a:spcBef>
+              <a:spcAft>
+                <a:spcPts val="0"/>
+              </a:spcAft>
+              <a:buClrTx/>
+              <a:buSzTx/>
+              <a:buFontTx/>
+              <a:buNone/>
+              <a:tabLst/>
+              <a:defRPr/>
+            </a:pPr>
+            <a:r>
+              <a:rPr kumimoji="0" lang="es-ES" sz="1800" b="1" i="0" u="none" strike="noStrike" kern="1200" cap="none" spc="0" normalizeH="0" baseline="0" noProof="0" dirty="0">
+                <a:ln>
+                  <a:noFill/>
+                </a:ln>
+                <a:solidFill>
+                  <a:prstClr val="white"/>
+                </a:solidFill>
+                <a:effectLst/>
+                <a:uLnTx/>
+                <a:uFillTx/>
+                <a:latin typeface="Calibri" panose="020F0502020204030204"/>
+                <a:ea typeface="+mn-ea"/>
+                <a:cs typeface="+mn-cs"/>
               </a:rPr>
               <a:t>  7</a:t>
             </a:r>
           </a:p>
         </p:txBody>
       </p:sp>
+      <p:pic>
+        <p:nvPicPr>
+          <p:cNvPr id="3" name="Picture 2">
+            <a:extLst>
+              <a:ext uri="{FF2B5EF4-FFF2-40B4-BE49-F238E27FC236}">
+                <a16:creationId xmlns:a16="http://schemas.microsoft.com/office/drawing/2014/main" id="{4529F148-F59F-F09D-0F6A-77867BC7941E}"/>
+              </a:ext>
+            </a:extLst>
+          </p:cNvPr>
+          <p:cNvPicPr>
+            <a:picLocks noChangeAspect="1"/>
+          </p:cNvPicPr>
+          <p:nvPr/>
+        </p:nvPicPr>
+        <p:blipFill>
+          <a:blip r:embed="rId2"/>
+          <a:stretch>
+            <a:fillRect/>
+          </a:stretch>
+        </p:blipFill>
+        <p:spPr>
+          <a:xfrm>
+            <a:off x="808369" y="1080485"/>
+            <a:ext cx="9720000" cy="6170374"/>
+          </a:xfrm>
+          <a:prstGeom prst="rect">
+            <a:avLst/>
+          </a:prstGeom>
+        </p:spPr>
+      </p:pic>
     </p:spTree>
     <p:extLst>
       <p:ext uri="{BB962C8B-B14F-4D97-AF65-F5344CB8AC3E}">
-        <p14:creationId xmlns:p14="http://schemas.microsoft.com/office/powerpoint/2010/main" val="2543459100"/>
+        <p14:creationId xmlns:p14="http://schemas.microsoft.com/office/powerpoint/2010/main" val="2274260815"/>
       </p:ext>
     </p:extLst>
   </p:cSld>
@@ -13212,7 +15827,13 @@
   <p:cSld>
     <p:spTree>
       <p:nvGrpSpPr>
-        <p:cNvPr id="1" name=""/>
+        <p:cNvPr id="1" name="">
+          <a:extLst>
+            <a:ext uri="{FF2B5EF4-FFF2-40B4-BE49-F238E27FC236}">
+              <a16:creationId xmlns:a16="http://schemas.microsoft.com/office/drawing/2014/main" id="{9CEBE83D-FC5D-7BBA-7620-C7D1258BA69F}"/>
+            </a:ext>
+          </a:extLst>
+        </p:cNvPr>
         <p:cNvGrpSpPr/>
         <p:nvPr/>
       </p:nvGrpSpPr>
@@ -13226,1057 +15847,10 @@
       </p:grpSpPr>
       <p:sp>
         <p:nvSpPr>
-          <p:cNvPr id="5" name="TextBox 4"/>
-          <p:cNvSpPr txBox="1"/>
-          <p:nvPr/>
-        </p:nvSpPr>
-        <p:spPr>
-          <a:xfrm>
-            <a:off x="365760" y="1051560"/>
-            <a:ext cx="1188720" cy="365760"/>
-          </a:xfrm>
-          <a:prstGeom prst="rect">
-            <a:avLst/>
-          </a:prstGeom>
-          <a:noFill/>
-        </p:spPr>
-        <p:txBody>
-          <a:bodyPr wrap="square">
-            <a:spAutoFit/>
-          </a:bodyPr>
-          <a:lstStyle/>
-          <a:p>
-            <a:pPr algn="l"/>
-            <a:r>
-              <a:rPr sz="1800" b="1">
-                <a:solidFill>
-                  <a:srgbClr val="FFFFFF"/>
-                </a:solidFill>
-              </a:rPr>
-              <a:t>Sprint</a:t>
-            </a:r>
-          </a:p>
-        </p:txBody>
-      </p:sp>
-      <p:sp>
-        <p:nvSpPr>
-          <p:cNvPr id="6" name="TextBox 5"/>
-          <p:cNvSpPr txBox="1"/>
-          <p:nvPr/>
-        </p:nvSpPr>
-        <p:spPr>
-          <a:xfrm>
-            <a:off x="1600200" y="1051560"/>
-            <a:ext cx="1828800" cy="365760"/>
-          </a:xfrm>
-          <a:prstGeom prst="rect">
-            <a:avLst/>
-          </a:prstGeom>
-          <a:noFill/>
-        </p:spPr>
-        <p:txBody>
-          <a:bodyPr wrap="square">
-            <a:spAutoFit/>
-          </a:bodyPr>
-          <a:lstStyle/>
-          <a:p>
-            <a:pPr algn="l"/>
-            <a:r>
-              <a:rPr sz="1800" b="1">
-                <a:solidFill>
-                  <a:srgbClr val="FFFFFF"/>
-                </a:solidFill>
-              </a:rPr>
-              <a:t>Focus</a:t>
-            </a:r>
-          </a:p>
-        </p:txBody>
-      </p:sp>
-      <p:sp>
-        <p:nvSpPr>
-          <p:cNvPr id="7" name="TextBox 6"/>
-          <p:cNvSpPr txBox="1"/>
-          <p:nvPr/>
-        </p:nvSpPr>
-        <p:spPr>
-          <a:xfrm>
-            <a:off x="3474720" y="1051560"/>
-            <a:ext cx="914400" cy="365760"/>
-          </a:xfrm>
-          <a:prstGeom prst="rect">
-            <a:avLst/>
-          </a:prstGeom>
-          <a:noFill/>
-        </p:spPr>
-        <p:txBody>
-          <a:bodyPr wrap="square">
-            <a:spAutoFit/>
-          </a:bodyPr>
-          <a:lstStyle/>
-          <a:p>
-            <a:pPr algn="l"/>
-            <a:r>
-              <a:rPr sz="1800" b="1">
-                <a:solidFill>
-                  <a:srgbClr val="FFFFFF"/>
-                </a:solidFill>
-              </a:rPr>
-              <a:t>Points</a:t>
-            </a:r>
-          </a:p>
-        </p:txBody>
-      </p:sp>
-      <p:sp>
-        <p:nvSpPr>
-          <p:cNvPr id="8" name="TextBox 7"/>
-          <p:cNvSpPr txBox="1"/>
-          <p:nvPr/>
-        </p:nvSpPr>
-        <p:spPr>
-          <a:xfrm>
-            <a:off x="4434840" y="1051560"/>
-            <a:ext cx="822960" cy="365760"/>
-          </a:xfrm>
-          <a:prstGeom prst="rect">
-            <a:avLst/>
-          </a:prstGeom>
-          <a:noFill/>
-        </p:spPr>
-        <p:txBody>
-          <a:bodyPr wrap="square">
-            <a:spAutoFit/>
-          </a:bodyPr>
-          <a:lstStyle/>
-          <a:p>
-            <a:pPr algn="l"/>
-            <a:r>
-              <a:rPr sz="1800" b="1">
-                <a:solidFill>
-                  <a:srgbClr val="FFFFFF"/>
-                </a:solidFill>
-              </a:rPr>
-              <a:t>Statut</a:t>
-            </a:r>
-          </a:p>
-        </p:txBody>
-      </p:sp>
-      <p:sp>
-        <p:nvSpPr>
-          <p:cNvPr id="9" name="TextBox 8"/>
-          <p:cNvSpPr txBox="1"/>
-          <p:nvPr/>
-        </p:nvSpPr>
-        <p:spPr>
-          <a:xfrm>
-            <a:off x="5303520" y="1051560"/>
-            <a:ext cx="3474720" cy="365760"/>
-          </a:xfrm>
-          <a:prstGeom prst="rect">
-            <a:avLst/>
-          </a:prstGeom>
-          <a:noFill/>
-        </p:spPr>
-        <p:txBody>
-          <a:bodyPr wrap="square">
-            <a:spAutoFit/>
-          </a:bodyPr>
-          <a:lstStyle/>
-          <a:p>
-            <a:pPr algn="l"/>
-            <a:r>
-              <a:rPr sz="1800" b="1">
-                <a:solidFill>
-                  <a:srgbClr val="FFFFFF"/>
-                </a:solidFill>
-              </a:rPr>
-              <a:t>Livrables principaux</a:t>
-            </a:r>
-          </a:p>
-        </p:txBody>
-      </p:sp>
-      <p:sp>
-        <p:nvSpPr>
-          <p:cNvPr id="10" name="TextBox 9"/>
-          <p:cNvSpPr txBox="1"/>
-          <p:nvPr/>
-        </p:nvSpPr>
-        <p:spPr>
-          <a:xfrm>
-            <a:off x="365760" y="1554480"/>
-            <a:ext cx="1188720" cy="457200"/>
-          </a:xfrm>
-          <a:prstGeom prst="rect">
-            <a:avLst/>
-          </a:prstGeom>
-          <a:noFill/>
-        </p:spPr>
-        <p:txBody>
-          <a:bodyPr wrap="square">
-            <a:spAutoFit/>
-          </a:bodyPr>
-          <a:lstStyle/>
-          <a:p>
-            <a:pPr algn="l"/>
-            <a:r>
-              <a:rPr sz="1800" b="1">
-                <a:solidFill>
-                  <a:srgbClr val="1A56DB"/>
-                </a:solidFill>
-              </a:rPr>
-              <a:t>Sprint 0</a:t>
-            </a:r>
-          </a:p>
-        </p:txBody>
-      </p:sp>
-      <p:sp>
-        <p:nvSpPr>
-          <p:cNvPr id="11" name="TextBox 10"/>
-          <p:cNvSpPr txBox="1"/>
-          <p:nvPr/>
-        </p:nvSpPr>
-        <p:spPr>
-          <a:xfrm>
-            <a:off x="1600200" y="1554480"/>
-            <a:ext cx="1828800" cy="457200"/>
-          </a:xfrm>
-          <a:prstGeom prst="rect">
-            <a:avLst/>
-          </a:prstGeom>
-          <a:noFill/>
-        </p:spPr>
-        <p:txBody>
-          <a:bodyPr wrap="square">
-            <a:spAutoFit/>
-          </a:bodyPr>
-          <a:lstStyle/>
-          <a:p>
-            <a:pPr algn="l"/>
-            <a:r>
-              <a:rPr sz="1800" b="0">
-                <a:solidFill>
-                  <a:srgbClr val="1E293B"/>
-                </a:solidFill>
-              </a:rPr>
-              <a:t>Initialisation</a:t>
-            </a:r>
-          </a:p>
-        </p:txBody>
-      </p:sp>
-      <p:sp>
-        <p:nvSpPr>
-          <p:cNvPr id="12" name="TextBox 11"/>
-          <p:cNvSpPr txBox="1"/>
-          <p:nvPr/>
-        </p:nvSpPr>
-        <p:spPr>
-          <a:xfrm>
-            <a:off x="3474720" y="1554480"/>
-            <a:ext cx="914400" cy="457200"/>
-          </a:xfrm>
-          <a:prstGeom prst="rect">
-            <a:avLst/>
-          </a:prstGeom>
-          <a:noFill/>
-        </p:spPr>
-        <p:txBody>
-          <a:bodyPr wrap="square">
-            <a:spAutoFit/>
-          </a:bodyPr>
-          <a:lstStyle/>
-          <a:p>
-            <a:pPr algn="l"/>
-            <a:r>
-              <a:rPr sz="1800" b="1">
-                <a:solidFill>
-                  <a:srgbClr val="10B981"/>
-                </a:solidFill>
-              </a:rPr>
-              <a:t>22 pts</a:t>
-            </a:r>
-          </a:p>
-        </p:txBody>
-      </p:sp>
-      <p:sp>
-        <p:nvSpPr>
-          <p:cNvPr id="13" name="TextBox 12"/>
-          <p:cNvSpPr txBox="1"/>
-          <p:nvPr/>
-        </p:nvSpPr>
-        <p:spPr>
-          <a:xfrm>
-            <a:off x="4434840" y="1554480"/>
-            <a:ext cx="822960" cy="457200"/>
-          </a:xfrm>
-          <a:prstGeom prst="rect">
-            <a:avLst/>
-          </a:prstGeom>
-          <a:noFill/>
-        </p:spPr>
-        <p:txBody>
-          <a:bodyPr wrap="square">
-            <a:spAutoFit/>
-          </a:bodyPr>
-          <a:lstStyle/>
-          <a:p>
-            <a:pPr algn="ctr"/>
-            <a:r>
-              <a:rPr sz="1800" b="0"/>
-              <a:t>✅</a:t>
-            </a:r>
-          </a:p>
-        </p:txBody>
-      </p:sp>
-      <p:sp>
-        <p:nvSpPr>
-          <p:cNvPr id="14" name="TextBox 13"/>
-          <p:cNvSpPr txBox="1"/>
-          <p:nvPr/>
-        </p:nvSpPr>
-        <p:spPr>
-          <a:xfrm>
-            <a:off x="5303520" y="1554480"/>
-            <a:ext cx="3474720" cy="502920"/>
-          </a:xfrm>
-          <a:prstGeom prst="rect">
-            <a:avLst/>
-          </a:prstGeom>
-          <a:noFill/>
-        </p:spPr>
-        <p:txBody>
-          <a:bodyPr wrap="square">
-            <a:spAutoFit/>
-          </a:bodyPr>
-          <a:lstStyle/>
-          <a:p>
-            <a:pPr algn="l"/>
-            <a:r>
-              <a:rPr sz="1800" b="0">
-                <a:solidFill>
-                  <a:srgbClr val="64748B"/>
-                </a:solidFill>
-              </a:rPr>
-              <a:t>Vision produit, backlog, DoD, environnement Git, architecture MVC validée</a:t>
-            </a:r>
-          </a:p>
-        </p:txBody>
-      </p:sp>
-      <p:sp>
-        <p:nvSpPr>
-          <p:cNvPr id="15" name="TextBox 14"/>
-          <p:cNvSpPr txBox="1"/>
-          <p:nvPr/>
-        </p:nvSpPr>
-        <p:spPr>
-          <a:xfrm>
-            <a:off x="365760" y="2395728"/>
-            <a:ext cx="1188720" cy="457200"/>
-          </a:xfrm>
-          <a:prstGeom prst="rect">
-            <a:avLst/>
-          </a:prstGeom>
-          <a:noFill/>
-        </p:spPr>
-        <p:txBody>
-          <a:bodyPr wrap="square">
-            <a:spAutoFit/>
-          </a:bodyPr>
-          <a:lstStyle/>
-          <a:p>
-            <a:pPr algn="l"/>
-            <a:r>
-              <a:rPr sz="1800" b="1">
-                <a:solidFill>
-                  <a:srgbClr val="1A56DB"/>
-                </a:solidFill>
-              </a:rPr>
-              <a:t>Sprint 1</a:t>
-            </a:r>
-          </a:p>
-        </p:txBody>
-      </p:sp>
-      <p:sp>
-        <p:nvSpPr>
-          <p:cNvPr id="16" name="TextBox 15"/>
-          <p:cNvSpPr txBox="1"/>
-          <p:nvPr/>
-        </p:nvSpPr>
-        <p:spPr>
-          <a:xfrm>
-            <a:off x="1600200" y="2395728"/>
-            <a:ext cx="1828800" cy="457200"/>
-          </a:xfrm>
-          <a:prstGeom prst="rect">
-            <a:avLst/>
-          </a:prstGeom>
-          <a:noFill/>
-        </p:spPr>
-        <p:txBody>
-          <a:bodyPr wrap="square">
-            <a:spAutoFit/>
-          </a:bodyPr>
-          <a:lstStyle/>
-          <a:p>
-            <a:pPr algn="l"/>
-            <a:r>
-              <a:rPr sz="1800" b="0">
-                <a:solidFill>
-                  <a:srgbClr val="1E293B"/>
-                </a:solidFill>
-              </a:rPr>
-              <a:t>Auth &amp; Associations</a:t>
-            </a:r>
-          </a:p>
-        </p:txBody>
-      </p:sp>
-      <p:sp>
-        <p:nvSpPr>
-          <p:cNvPr id="17" name="TextBox 16"/>
-          <p:cNvSpPr txBox="1"/>
-          <p:nvPr/>
-        </p:nvSpPr>
-        <p:spPr>
-          <a:xfrm>
-            <a:off x="3474720" y="2395728"/>
-            <a:ext cx="914400" cy="457200"/>
-          </a:xfrm>
-          <a:prstGeom prst="rect">
-            <a:avLst/>
-          </a:prstGeom>
-          <a:noFill/>
-        </p:spPr>
-        <p:txBody>
-          <a:bodyPr wrap="square">
-            <a:spAutoFit/>
-          </a:bodyPr>
-          <a:lstStyle/>
-          <a:p>
-            <a:pPr algn="l"/>
-            <a:r>
-              <a:rPr sz="1800" b="1">
-                <a:solidFill>
-                  <a:srgbClr val="10B981"/>
-                </a:solidFill>
-              </a:rPr>
-              <a:t>23 pts</a:t>
-            </a:r>
-          </a:p>
-        </p:txBody>
-      </p:sp>
-      <p:sp>
-        <p:nvSpPr>
-          <p:cNvPr id="18" name="TextBox 17"/>
-          <p:cNvSpPr txBox="1"/>
-          <p:nvPr/>
-        </p:nvSpPr>
-        <p:spPr>
-          <a:xfrm>
-            <a:off x="4434840" y="2395728"/>
-            <a:ext cx="822960" cy="457200"/>
-          </a:xfrm>
-          <a:prstGeom prst="rect">
-            <a:avLst/>
-          </a:prstGeom>
-          <a:noFill/>
-        </p:spPr>
-        <p:txBody>
-          <a:bodyPr wrap="square">
-            <a:spAutoFit/>
-          </a:bodyPr>
-          <a:lstStyle/>
-          <a:p>
-            <a:pPr algn="ctr"/>
-            <a:r>
-              <a:rPr sz="1800" b="0"/>
-              <a:t>✅</a:t>
-            </a:r>
-          </a:p>
-        </p:txBody>
-      </p:sp>
-      <p:sp>
-        <p:nvSpPr>
-          <p:cNvPr id="19" name="TextBox 18"/>
-          <p:cNvSpPr txBox="1"/>
-          <p:nvPr/>
-        </p:nvSpPr>
-        <p:spPr>
-          <a:xfrm>
-            <a:off x="5303520" y="2395728"/>
-            <a:ext cx="3474720" cy="502920"/>
-          </a:xfrm>
-          <a:prstGeom prst="rect">
-            <a:avLst/>
-          </a:prstGeom>
-          <a:noFill/>
-        </p:spPr>
-        <p:txBody>
-          <a:bodyPr wrap="square">
-            <a:spAutoFit/>
-          </a:bodyPr>
-          <a:lstStyle/>
-          <a:p>
-            <a:pPr algn="l"/>
-            <a:r>
-              <a:rPr sz="1800" b="0">
-                <a:solidFill>
-                  <a:srgbClr val="64748B"/>
-                </a:solidFill>
-              </a:rPr>
-              <a:t>Inscription, JWT, email confirm, rôles, annuaire associations</a:t>
-            </a:r>
-          </a:p>
-        </p:txBody>
-      </p:sp>
-      <p:sp>
-        <p:nvSpPr>
-          <p:cNvPr id="20" name="TextBox 19"/>
-          <p:cNvSpPr txBox="1"/>
-          <p:nvPr/>
-        </p:nvSpPr>
-        <p:spPr>
-          <a:xfrm>
-            <a:off x="365760" y="3236976"/>
-            <a:ext cx="1188720" cy="457200"/>
-          </a:xfrm>
-          <a:prstGeom prst="rect">
-            <a:avLst/>
-          </a:prstGeom>
-          <a:noFill/>
-        </p:spPr>
-        <p:txBody>
-          <a:bodyPr wrap="square">
-            <a:spAutoFit/>
-          </a:bodyPr>
-          <a:lstStyle/>
-          <a:p>
-            <a:pPr algn="l"/>
-            <a:r>
-              <a:rPr sz="1800" b="1">
-                <a:solidFill>
-                  <a:srgbClr val="1A56DB"/>
-                </a:solidFill>
-              </a:rPr>
-              <a:t>Sprint 2</a:t>
-            </a:r>
-          </a:p>
-        </p:txBody>
-      </p:sp>
-      <p:sp>
-        <p:nvSpPr>
-          <p:cNvPr id="21" name="TextBox 20"/>
-          <p:cNvSpPr txBox="1"/>
-          <p:nvPr/>
-        </p:nvSpPr>
-        <p:spPr>
-          <a:xfrm>
-            <a:off x="1600200" y="3236976"/>
-            <a:ext cx="1828800" cy="457200"/>
-          </a:xfrm>
-          <a:prstGeom prst="rect">
-            <a:avLst/>
-          </a:prstGeom>
-          <a:noFill/>
-        </p:spPr>
-        <p:txBody>
-          <a:bodyPr wrap="square">
-            <a:spAutoFit/>
-          </a:bodyPr>
-          <a:lstStyle/>
-          <a:p>
-            <a:pPr algn="l"/>
-            <a:r>
-              <a:rPr sz="1800" b="0">
-                <a:solidFill>
-                  <a:srgbClr val="1E293B"/>
-                </a:solidFill>
-              </a:rPr>
-              <a:t>Adhésions &amp; Événements</a:t>
-            </a:r>
-          </a:p>
-        </p:txBody>
-      </p:sp>
-      <p:sp>
-        <p:nvSpPr>
-          <p:cNvPr id="22" name="TextBox 21"/>
-          <p:cNvSpPr txBox="1"/>
-          <p:nvPr/>
-        </p:nvSpPr>
-        <p:spPr>
-          <a:xfrm>
-            <a:off x="3474720" y="3236976"/>
-            <a:ext cx="914400" cy="457200"/>
-          </a:xfrm>
-          <a:prstGeom prst="rect">
-            <a:avLst/>
-          </a:prstGeom>
-          <a:noFill/>
-        </p:spPr>
-        <p:txBody>
-          <a:bodyPr wrap="square">
-            <a:spAutoFit/>
-          </a:bodyPr>
-          <a:lstStyle/>
-          <a:p>
-            <a:pPr algn="l"/>
-            <a:r>
-              <a:rPr sz="1800" b="1">
-                <a:solidFill>
-                  <a:srgbClr val="10B981"/>
-                </a:solidFill>
-              </a:rPr>
-              <a:t>31 pts</a:t>
-            </a:r>
-          </a:p>
-        </p:txBody>
-      </p:sp>
-      <p:sp>
-        <p:nvSpPr>
-          <p:cNvPr id="23" name="TextBox 22"/>
-          <p:cNvSpPr txBox="1"/>
-          <p:nvPr/>
-        </p:nvSpPr>
-        <p:spPr>
-          <a:xfrm>
-            <a:off x="4434840" y="3236976"/>
-            <a:ext cx="822960" cy="457200"/>
-          </a:xfrm>
-          <a:prstGeom prst="rect">
-            <a:avLst/>
-          </a:prstGeom>
-          <a:noFill/>
-        </p:spPr>
-        <p:txBody>
-          <a:bodyPr wrap="square">
-            <a:spAutoFit/>
-          </a:bodyPr>
-          <a:lstStyle/>
-          <a:p>
-            <a:pPr algn="ctr"/>
-            <a:r>
-              <a:rPr sz="1800" b="0"/>
-              <a:t>✅</a:t>
-            </a:r>
-          </a:p>
-        </p:txBody>
-      </p:sp>
-      <p:sp>
-        <p:nvSpPr>
-          <p:cNvPr id="24" name="TextBox 23"/>
-          <p:cNvSpPr txBox="1"/>
-          <p:nvPr/>
-        </p:nvSpPr>
-        <p:spPr>
-          <a:xfrm>
-            <a:off x="5303520" y="3236976"/>
-            <a:ext cx="3474720" cy="502920"/>
-          </a:xfrm>
-          <a:prstGeom prst="rect">
-            <a:avLst/>
-          </a:prstGeom>
-          <a:noFill/>
-        </p:spPr>
-        <p:txBody>
-          <a:bodyPr wrap="square">
-            <a:spAutoFit/>
-          </a:bodyPr>
-          <a:lstStyle/>
-          <a:p>
-            <a:pPr algn="l"/>
-            <a:r>
-              <a:rPr sz="1800" b="0">
-                <a:solidFill>
-                  <a:srgbClr val="64748B"/>
-                </a:solidFill>
-              </a:rPr>
-              <a:t>Anti-conflit salle, inscriptions, tarification, liste nominative</a:t>
-            </a:r>
-          </a:p>
-        </p:txBody>
-      </p:sp>
-      <p:sp>
-        <p:nvSpPr>
-          <p:cNvPr id="25" name="TextBox 24"/>
-          <p:cNvSpPr txBox="1"/>
-          <p:nvPr/>
-        </p:nvSpPr>
-        <p:spPr>
-          <a:xfrm>
-            <a:off x="365760" y="4078224"/>
-            <a:ext cx="1188720" cy="457200"/>
-          </a:xfrm>
-          <a:prstGeom prst="rect">
-            <a:avLst/>
-          </a:prstGeom>
-          <a:noFill/>
-        </p:spPr>
-        <p:txBody>
-          <a:bodyPr wrap="square">
-            <a:spAutoFit/>
-          </a:bodyPr>
-          <a:lstStyle/>
-          <a:p>
-            <a:pPr algn="l"/>
-            <a:r>
-              <a:rPr sz="1800" b="1">
-                <a:solidFill>
-                  <a:srgbClr val="1A56DB"/>
-                </a:solidFill>
-              </a:rPr>
-              <a:t>Sprint 3</a:t>
-            </a:r>
-          </a:p>
-        </p:txBody>
-      </p:sp>
-      <p:sp>
-        <p:nvSpPr>
-          <p:cNvPr id="26" name="TextBox 25"/>
-          <p:cNvSpPr txBox="1"/>
-          <p:nvPr/>
-        </p:nvSpPr>
-        <p:spPr>
-          <a:xfrm>
-            <a:off x="1600200" y="4078224"/>
-            <a:ext cx="1828800" cy="457200"/>
-          </a:xfrm>
-          <a:prstGeom prst="rect">
-            <a:avLst/>
-          </a:prstGeom>
-          <a:noFill/>
-        </p:spPr>
-        <p:txBody>
-          <a:bodyPr wrap="square">
-            <a:spAutoFit/>
-          </a:bodyPr>
-          <a:lstStyle/>
-          <a:p>
-            <a:pPr algn="l"/>
-            <a:r>
-              <a:rPr sz="1800" b="0">
-                <a:solidFill>
-                  <a:srgbClr val="1E293B"/>
-                </a:solidFill>
-              </a:rPr>
-              <a:t>Notifs &amp; Dashboards</a:t>
-            </a:r>
-          </a:p>
-        </p:txBody>
-      </p:sp>
-      <p:sp>
-        <p:nvSpPr>
-          <p:cNvPr id="27" name="TextBox 26"/>
-          <p:cNvSpPr txBox="1"/>
-          <p:nvPr/>
-        </p:nvSpPr>
-        <p:spPr>
-          <a:xfrm>
-            <a:off x="3474720" y="4078224"/>
-            <a:ext cx="914400" cy="457200"/>
-          </a:xfrm>
-          <a:prstGeom prst="rect">
-            <a:avLst/>
-          </a:prstGeom>
-          <a:noFill/>
-        </p:spPr>
-        <p:txBody>
-          <a:bodyPr wrap="square">
-            <a:spAutoFit/>
-          </a:bodyPr>
-          <a:lstStyle/>
-          <a:p>
-            <a:pPr algn="l"/>
-            <a:r>
-              <a:rPr sz="1800" b="1">
-                <a:solidFill>
-                  <a:srgbClr val="10B981"/>
-                </a:solidFill>
-              </a:rPr>
-              <a:t>29 pts</a:t>
-            </a:r>
-          </a:p>
-        </p:txBody>
-      </p:sp>
-      <p:sp>
-        <p:nvSpPr>
-          <p:cNvPr id="28" name="TextBox 27"/>
-          <p:cNvSpPr txBox="1"/>
-          <p:nvPr/>
-        </p:nvSpPr>
-        <p:spPr>
-          <a:xfrm>
-            <a:off x="4434840" y="4078224"/>
-            <a:ext cx="822960" cy="457200"/>
-          </a:xfrm>
-          <a:prstGeom prst="rect">
-            <a:avLst/>
-          </a:prstGeom>
-          <a:noFill/>
-        </p:spPr>
-        <p:txBody>
-          <a:bodyPr wrap="square">
-            <a:spAutoFit/>
-          </a:bodyPr>
-          <a:lstStyle/>
-          <a:p>
-            <a:pPr algn="ctr"/>
-            <a:r>
-              <a:rPr sz="1800" b="0"/>
-              <a:t>✅</a:t>
-            </a:r>
-          </a:p>
-        </p:txBody>
-      </p:sp>
-      <p:sp>
-        <p:nvSpPr>
-          <p:cNvPr id="29" name="TextBox 28"/>
-          <p:cNvSpPr txBox="1"/>
-          <p:nvPr/>
-        </p:nvSpPr>
-        <p:spPr>
-          <a:xfrm>
-            <a:off x="5303520" y="4078224"/>
-            <a:ext cx="3474720" cy="502920"/>
-          </a:xfrm>
-          <a:prstGeom prst="rect">
-            <a:avLst/>
-          </a:prstGeom>
-          <a:noFill/>
-        </p:spPr>
-        <p:txBody>
-          <a:bodyPr wrap="square">
-            <a:spAutoFit/>
-          </a:bodyPr>
-          <a:lstStyle/>
-          <a:p>
-            <a:pPr algn="l"/>
-            <a:r>
-              <a:rPr sz="1800" b="0">
-                <a:solidFill>
-                  <a:srgbClr val="64748B"/>
-                </a:solidFill>
-              </a:rPr>
-              <a:t>Emails auto, cron rappels, trésorerie, historique participant</a:t>
-            </a:r>
-          </a:p>
-        </p:txBody>
-      </p:sp>
-      <p:sp>
-        <p:nvSpPr>
-          <p:cNvPr id="30" name="TextBox 29"/>
-          <p:cNvSpPr txBox="1"/>
-          <p:nvPr/>
-        </p:nvSpPr>
-        <p:spPr>
-          <a:xfrm>
-            <a:off x="365760" y="4919472"/>
-            <a:ext cx="1188720" cy="457200"/>
-          </a:xfrm>
-          <a:prstGeom prst="rect">
-            <a:avLst/>
-          </a:prstGeom>
-          <a:noFill/>
-        </p:spPr>
-        <p:txBody>
-          <a:bodyPr wrap="square">
-            <a:spAutoFit/>
-          </a:bodyPr>
-          <a:lstStyle/>
-          <a:p>
-            <a:pPr algn="l"/>
-            <a:r>
-              <a:rPr sz="1800" b="1">
-                <a:solidFill>
-                  <a:srgbClr val="1A56DB"/>
-                </a:solidFill>
-              </a:rPr>
-              <a:t>Sprint 4</a:t>
-            </a:r>
-          </a:p>
-        </p:txBody>
-      </p:sp>
-      <p:sp>
-        <p:nvSpPr>
-          <p:cNvPr id="31" name="TextBox 30"/>
-          <p:cNvSpPr txBox="1"/>
-          <p:nvPr/>
-        </p:nvSpPr>
-        <p:spPr>
-          <a:xfrm>
-            <a:off x="1600200" y="4919472"/>
-            <a:ext cx="1828800" cy="457200"/>
-          </a:xfrm>
-          <a:prstGeom prst="rect">
-            <a:avLst/>
-          </a:prstGeom>
-          <a:noFill/>
-        </p:spPr>
-        <p:txBody>
-          <a:bodyPr wrap="square">
-            <a:spAutoFit/>
-          </a:bodyPr>
-          <a:lstStyle/>
-          <a:p>
-            <a:pPr algn="l"/>
-            <a:r>
-              <a:rPr sz="1800" b="0">
-                <a:solidFill>
-                  <a:srgbClr val="1E293B"/>
-                </a:solidFill>
-              </a:rPr>
-              <a:t>Freemium &amp; Livraison</a:t>
-            </a:r>
-          </a:p>
-        </p:txBody>
-      </p:sp>
-      <p:sp>
-        <p:nvSpPr>
-          <p:cNvPr id="32" name="TextBox 31"/>
-          <p:cNvSpPr txBox="1"/>
-          <p:nvPr/>
-        </p:nvSpPr>
-        <p:spPr>
-          <a:xfrm>
-            <a:off x="3474720" y="4919472"/>
-            <a:ext cx="914400" cy="457200"/>
-          </a:xfrm>
-          <a:prstGeom prst="rect">
-            <a:avLst/>
-          </a:prstGeom>
-          <a:noFill/>
-        </p:spPr>
-        <p:txBody>
-          <a:bodyPr wrap="square">
-            <a:spAutoFit/>
-          </a:bodyPr>
-          <a:lstStyle/>
-          <a:p>
-            <a:pPr algn="l"/>
-            <a:r>
-              <a:rPr sz="1800" b="1">
-                <a:solidFill>
-                  <a:srgbClr val="10B981"/>
-                </a:solidFill>
-              </a:rPr>
-              <a:t>29 pts</a:t>
-            </a:r>
-          </a:p>
-        </p:txBody>
-      </p:sp>
-      <p:sp>
-        <p:nvSpPr>
-          <p:cNvPr id="33" name="TextBox 32"/>
-          <p:cNvSpPr txBox="1"/>
-          <p:nvPr/>
-        </p:nvSpPr>
-        <p:spPr>
-          <a:xfrm>
-            <a:off x="4434840" y="4919472"/>
-            <a:ext cx="822960" cy="457200"/>
-          </a:xfrm>
-          <a:prstGeom prst="rect">
-            <a:avLst/>
-          </a:prstGeom>
-          <a:noFill/>
-        </p:spPr>
-        <p:txBody>
-          <a:bodyPr wrap="square">
-            <a:spAutoFit/>
-          </a:bodyPr>
-          <a:lstStyle/>
-          <a:p>
-            <a:pPr algn="ctr"/>
-            <a:r>
-              <a:rPr sz="1800" b="0"/>
-              <a:t>✅</a:t>
-            </a:r>
-          </a:p>
-        </p:txBody>
-      </p:sp>
-      <p:sp>
-        <p:nvSpPr>
-          <p:cNvPr id="34" name="TextBox 33"/>
-          <p:cNvSpPr txBox="1"/>
-          <p:nvPr/>
-        </p:nvSpPr>
-        <p:spPr>
-          <a:xfrm>
-            <a:off x="5303520" y="4919472"/>
-            <a:ext cx="3474720" cy="502920"/>
-          </a:xfrm>
-          <a:prstGeom prst="rect">
-            <a:avLst/>
-          </a:prstGeom>
-          <a:noFill/>
-        </p:spPr>
-        <p:txBody>
-          <a:bodyPr wrap="square">
-            <a:spAutoFit/>
-          </a:bodyPr>
-          <a:lstStyle/>
-          <a:p>
-            <a:pPr algn="l"/>
-            <a:r>
-              <a:rPr sz="1800" b="0">
-                <a:solidFill>
-                  <a:srgbClr val="64748B"/>
-                </a:solidFill>
-              </a:rPr>
-              <a:t>RBAC complet, commissions, sponsors, Swagger, corrections</a:t>
-            </a:r>
-          </a:p>
-        </p:txBody>
-      </p:sp>
-      <p:sp>
-        <p:nvSpPr>
-          <p:cNvPr id="35" name="TextBox 34"/>
-          <p:cNvSpPr txBox="1"/>
-          <p:nvPr/>
-        </p:nvSpPr>
-        <p:spPr>
-          <a:xfrm>
-            <a:off x="365760" y="5920504"/>
-            <a:ext cx="8229600" cy="411480"/>
-          </a:xfrm>
-          <a:prstGeom prst="rect">
-            <a:avLst/>
-          </a:prstGeom>
-          <a:noFill/>
-        </p:spPr>
-        <p:txBody>
-          <a:bodyPr wrap="square">
-            <a:spAutoFit/>
-          </a:bodyPr>
-          <a:lstStyle/>
-          <a:p>
-            <a:pPr algn="ctr"/>
-            <a:r>
-              <a:rPr sz="1800" b="1" dirty="0">
-                <a:solidFill>
-                  <a:srgbClr val="1A56DB"/>
-                </a:solidFill>
-              </a:rPr>
-              <a:t>Total : 134 points story  |  5 sprints  |  100% </a:t>
-            </a:r>
-            <a:r>
-              <a:rPr sz="1800" b="1" dirty="0" err="1">
-                <a:solidFill>
-                  <a:srgbClr val="1A56DB"/>
-                </a:solidFill>
-              </a:rPr>
-              <a:t>complété</a:t>
-            </a:r>
-            <a:endParaRPr sz="1800" b="1" dirty="0">
-              <a:solidFill>
-                <a:srgbClr val="1A56DB"/>
-              </a:solidFill>
-            </a:endParaRPr>
-          </a:p>
-        </p:txBody>
-      </p:sp>
-      <p:sp>
-        <p:nvSpPr>
-          <p:cNvPr id="36" name="Shape 14">
-            <a:extLst>
-              <a:ext uri="{FF2B5EF4-FFF2-40B4-BE49-F238E27FC236}">
-                <a16:creationId xmlns:a16="http://schemas.microsoft.com/office/drawing/2014/main" id="{B711363B-AFD9-A70D-257F-779212996399}"/>
+          <p:cNvPr id="5" name="Shape 0">
+            <a:extLst>
+              <a:ext uri="{FF2B5EF4-FFF2-40B4-BE49-F238E27FC236}">
+                <a16:creationId xmlns:a16="http://schemas.microsoft.com/office/drawing/2014/main" id="{8A1D30BF-C719-2BFD-6D62-DE8DE2FA41D7}"/>
               </a:ext>
             </a:extLst>
           </p:cNvPr>
@@ -14285,8 +15859,8 @@
         </p:nvSpPr>
         <p:spPr>
           <a:xfrm>
-            <a:off x="11482791" y="6331984"/>
-            <a:ext cx="502920" cy="365760"/>
+            <a:off x="0" y="0"/>
+            <a:ext cx="12192000" cy="1005840"/>
           </a:xfrm>
           <a:prstGeom prst="rect">
             <a:avLst/>
@@ -14305,23 +15879,131 @@
           <a:bodyPr/>
           <a:lstStyle/>
           <a:p>
-            <a:r>
-              <a:rPr lang="es-ES" sz="1800" b="1" dirty="0">
-                <a:solidFill>
-                  <a:schemeClr val="bg1"/>
-                </a:solidFill>
-              </a:rPr>
-              <a:t>  8</a:t>
-            </a:r>
-          </a:p>
-        </p:txBody>
-      </p:sp>
-      <p:sp>
-        <p:nvSpPr>
-          <p:cNvPr id="37" name="Shape 0">
-            <a:extLst>
-              <a:ext uri="{FF2B5EF4-FFF2-40B4-BE49-F238E27FC236}">
-                <a16:creationId xmlns:a16="http://schemas.microsoft.com/office/drawing/2014/main" id="{BB6BFB96-E48B-FF92-6C42-D06257294500}"/>
+            <a:pPr marL="0" marR="0" lvl="0" indent="0" algn="l" defTabSz="914400" rtl="0" eaLnBrk="1" fontAlgn="auto" latinLnBrk="0" hangingPunct="1">
+              <a:lnSpc>
+                <a:spcPct val="100000"/>
+              </a:lnSpc>
+              <a:spcBef>
+                <a:spcPts val="0"/>
+              </a:spcBef>
+              <a:spcAft>
+                <a:spcPts val="0"/>
+              </a:spcAft>
+              <a:buClrTx/>
+              <a:buSzTx/>
+              <a:buFontTx/>
+              <a:buNone/>
+              <a:tabLst/>
+              <a:defRPr/>
+            </a:pPr>
+            <a:endParaRPr kumimoji="0" lang="es-ES" sz="1800" b="0" i="0" u="none" strike="noStrike" kern="1200" cap="none" spc="0" normalizeH="0" baseline="0" noProof="0" dirty="0">
+              <a:ln>
+                <a:noFill/>
+              </a:ln>
+              <a:solidFill>
+                <a:prstClr val="white"/>
+              </a:solidFill>
+              <a:effectLst/>
+              <a:uLnTx/>
+              <a:uFillTx/>
+              <a:latin typeface="Calibri" panose="020F0502020204030204"/>
+              <a:ea typeface="+mn-ea"/>
+              <a:cs typeface="+mn-cs"/>
+            </a:endParaRPr>
+          </a:p>
+        </p:txBody>
+      </p:sp>
+      <p:sp>
+        <p:nvSpPr>
+          <p:cNvPr id="6" name="TextBox 5">
+            <a:extLst>
+              <a:ext uri="{FF2B5EF4-FFF2-40B4-BE49-F238E27FC236}">
+                <a16:creationId xmlns:a16="http://schemas.microsoft.com/office/drawing/2014/main" id="{16606AFC-CC2D-2842-1B0E-3B8E418E6DB2}"/>
+              </a:ext>
+            </a:extLst>
+          </p:cNvPr>
+          <p:cNvSpPr txBox="1"/>
+          <p:nvPr/>
+        </p:nvSpPr>
+        <p:spPr>
+          <a:xfrm>
+            <a:off x="546755" y="226243"/>
+            <a:ext cx="9257645" cy="584775"/>
+          </a:xfrm>
+          <a:prstGeom prst="rect">
+            <a:avLst/>
+          </a:prstGeom>
+          <a:noFill/>
+        </p:spPr>
+        <p:txBody>
+          <a:bodyPr wrap="square" rtlCol="0">
+            <a:spAutoFit/>
+          </a:bodyPr>
+          <a:lstStyle/>
+          <a:p>
+            <a:pPr lvl="0"/>
+            <a:r>
+              <a:rPr lang="es-ES" sz="3200" b="1" dirty="0">
+                <a:solidFill>
+                  <a:prstClr val="white"/>
+                </a:solidFill>
+              </a:rPr>
+              <a:t>06 — </a:t>
+            </a:r>
+            <a:r>
+              <a:rPr lang="es-ES" sz="3200" b="1" dirty="0" err="1">
+                <a:solidFill>
+                  <a:prstClr val="white"/>
+                </a:solidFill>
+              </a:rPr>
+              <a:t>Conceptions</a:t>
+            </a:r>
+            <a:r>
+              <a:rPr lang="es-ES" sz="3200" b="1" dirty="0">
+                <a:solidFill>
+                  <a:prstClr val="white"/>
+                </a:solidFill>
+              </a:rPr>
+              <a:t> - </a:t>
+            </a:r>
+            <a:r>
+              <a:rPr lang="es-ES" sz="3200" b="1" dirty="0" err="1">
+                <a:solidFill>
+                  <a:prstClr val="white"/>
+                </a:solidFill>
+              </a:rPr>
+              <a:t>Diagramme</a:t>
+            </a:r>
+            <a:r>
+              <a:rPr lang="es-ES" sz="3200" b="1" dirty="0">
+                <a:solidFill>
+                  <a:prstClr val="white"/>
+                </a:solidFill>
+              </a:rPr>
+              <a:t> de cas </a:t>
+            </a:r>
+            <a:r>
+              <a:rPr lang="es-ES" sz="3200" b="1" dirty="0" err="1">
+                <a:solidFill>
+                  <a:prstClr val="white"/>
+                </a:solidFill>
+              </a:rPr>
+              <a:t>d'utilisation</a:t>
+            </a:r>
+            <a:endParaRPr lang="es-ES" sz="3200" b="1" dirty="0">
+              <a:solidFill>
+                <a:prstClr val="white"/>
+              </a:solidFill>
+            </a:endParaRPr>
+          </a:p>
+        </p:txBody>
+      </p:sp>
+      <p:sp>
+        <p:nvSpPr>
+          <p:cNvPr id="8" name="Shape 14">
+            <a:extLst>
+              <a:ext uri="{FF2B5EF4-FFF2-40B4-BE49-F238E27FC236}">
+                <a16:creationId xmlns:a16="http://schemas.microsoft.com/office/drawing/2014/main" id="{1BA972BA-7A93-9DCA-6125-CD5BE3D8D074}"/>
               </a:ext>
             </a:extLst>
           </p:cNvPr>
@@ -14330,8 +16012,8 @@
         </p:nvSpPr>
         <p:spPr>
           <a:xfrm>
-            <a:off x="0" y="0"/>
-            <a:ext cx="12192000" cy="1005840"/>
+            <a:off x="11445083" y="6294277"/>
+            <a:ext cx="502920" cy="365760"/>
           </a:xfrm>
           <a:prstGeom prst="rect">
             <a:avLst/>
@@ -14350,54 +16032,79 @@
           <a:bodyPr/>
           <a:lstStyle/>
           <a:p>
-            <a:endParaRPr lang="es-ES" dirty="0">
-              <a:solidFill>
-                <a:schemeClr val="bg1"/>
-              </a:solidFill>
-            </a:endParaRPr>
-          </a:p>
-        </p:txBody>
-      </p:sp>
-      <p:sp>
-        <p:nvSpPr>
-          <p:cNvPr id="38" name="TextBox 37">
-            <a:extLst>
-              <a:ext uri="{FF2B5EF4-FFF2-40B4-BE49-F238E27FC236}">
-                <a16:creationId xmlns:a16="http://schemas.microsoft.com/office/drawing/2014/main" id="{BEA831FC-836F-5DF6-9758-17A9B6A343E8}"/>
-              </a:ext>
-            </a:extLst>
-          </p:cNvPr>
-          <p:cNvSpPr txBox="1"/>
+            <a:pPr marL="0" marR="0" lvl="0" indent="0" algn="l" defTabSz="914400" rtl="0" eaLnBrk="1" fontAlgn="auto" latinLnBrk="0" hangingPunct="1">
+              <a:lnSpc>
+                <a:spcPct val="100000"/>
+              </a:lnSpc>
+              <a:spcBef>
+                <a:spcPts val="0"/>
+              </a:spcBef>
+              <a:spcAft>
+                <a:spcPts val="0"/>
+              </a:spcAft>
+              <a:buClrTx/>
+              <a:buSzTx/>
+              <a:buFontTx/>
+              <a:buNone/>
+              <a:tabLst/>
+              <a:defRPr/>
+            </a:pPr>
+            <a:r>
+              <a:rPr kumimoji="0" lang="es-ES" sz="1800" b="1" i="0" u="none" strike="noStrike" kern="1200" cap="none" spc="0" normalizeH="0" baseline="0" noProof="0" dirty="0">
+                <a:ln>
+                  <a:noFill/>
+                </a:ln>
+                <a:solidFill>
+                  <a:prstClr val="white"/>
+                </a:solidFill>
+                <a:effectLst/>
+                <a:uLnTx/>
+                <a:uFillTx/>
+                <a:latin typeface="Calibri" panose="020F0502020204030204"/>
+                <a:ea typeface="+mn-ea"/>
+                <a:cs typeface="+mn-cs"/>
+              </a:rPr>
+              <a:t>  7</a:t>
+            </a:r>
+          </a:p>
+        </p:txBody>
+      </p:sp>
+      <p:pic>
+        <p:nvPicPr>
+          <p:cNvPr id="3" name="Picture 2">
+            <a:extLst>
+              <a:ext uri="{FF2B5EF4-FFF2-40B4-BE49-F238E27FC236}">
+                <a16:creationId xmlns:a16="http://schemas.microsoft.com/office/drawing/2014/main" id="{3766C698-84AA-C6E9-6F28-75617E6F00AC}"/>
+              </a:ext>
+            </a:extLst>
+          </p:cNvPr>
+          <p:cNvPicPr>
+            <a:picLocks noChangeAspect="1"/>
+          </p:cNvPicPr>
           <p:nvPr/>
-        </p:nvSpPr>
-        <p:spPr>
-          <a:xfrm>
-            <a:off x="365760" y="226243"/>
-            <a:ext cx="8806520" cy="584775"/>
+        </p:nvPicPr>
+        <p:blipFill>
+          <a:blip r:embed="rId2"/>
+          <a:stretch>
+            <a:fillRect/>
+          </a:stretch>
+        </p:blipFill>
+        <p:spPr>
+          <a:xfrm>
+            <a:off x="2186070" y="1005840"/>
+            <a:ext cx="7200000" cy="6207774"/>
           </a:xfrm>
           <a:prstGeom prst="rect">
             <a:avLst/>
           </a:prstGeom>
-          <a:noFill/>
-        </p:spPr>
-        <p:txBody>
-          <a:bodyPr wrap="square" rtlCol="0">
-            <a:spAutoFit/>
-          </a:bodyPr>
-          <a:lstStyle/>
-          <a:p>
-            <a:r>
-              <a:rPr lang="es-ES" sz="3200" b="1" dirty="0">
-                <a:solidFill>
-                  <a:schemeClr val="bg1"/>
-                </a:solidFill>
-              </a:rPr>
-              <a:t>07 — Méthodologie Scrum &amp; Sprints</a:t>
-            </a:r>
-          </a:p>
-        </p:txBody>
-      </p:sp>
+        </p:spPr>
+      </p:pic>
     </p:spTree>
+    <p:extLst>
+      <p:ext uri="{BB962C8B-B14F-4D97-AF65-F5344CB8AC3E}">
+        <p14:creationId xmlns:p14="http://schemas.microsoft.com/office/powerpoint/2010/main" val="924544605"/>
+      </p:ext>
+    </p:extLst>
   </p:cSld>
   <p:clrMapOvr>
     <a:masterClrMapping/>
